--- a/全因為你.pptx
+++ b/全因為你.pptx
@@ -5,12 +5,20 @@
     <p:sldMasterId id="2147483684" r:id="rId1"/>
   </p:sldMasterIdLst>
   <p:sldIdLst>
-    <p:sldId id="256" r:id="rId2"/>
-    <p:sldId id="257" r:id="rId3"/>
-    <p:sldId id="258" r:id="rId4"/>
-    <p:sldId id="259" r:id="rId5"/>
+    <p:sldId id="391" r:id="rId2"/>
+    <p:sldId id="392" r:id="rId3"/>
+    <p:sldId id="393" r:id="rId4"/>
+    <p:sldId id="394" r:id="rId5"/>
+    <p:sldId id="395" r:id="rId6"/>
+    <p:sldId id="396" r:id="rId7"/>
+    <p:sldId id="397" r:id="rId8"/>
+    <p:sldId id="398" r:id="rId9"/>
+    <p:sldId id="399" r:id="rId10"/>
+    <p:sldId id="400" r:id="rId11"/>
+    <p:sldId id="401" r:id="rId12"/>
+    <p:sldId id="402" r:id="rId13"/>
   </p:sldIdLst>
-  <p:sldSz cx="9144000" cy="6858000" type="screen4x3"/>
+  <p:sldSz cx="12192000" cy="6858000"/>
   <p:notesSz cx="6858000" cy="9144000"/>
   <p:defaultTextStyle>
     <a:defPPr>
@@ -107,6 +115,22 @@
       </a:defRPr>
     </a:lvl9pPr>
   </p:defaultTextStyle>
+  <p:extLst>
+    <p:ext uri="{EFAFB233-063F-42B5-8137-9DF3F51BA10A}">
+      <p15:sldGuideLst xmlns:p15="http://schemas.microsoft.com/office/powerpoint/2012/main">
+        <p15:guide id="1" orient="horz" pos="2160" userDrawn="1">
+          <p15:clr>
+            <a:srgbClr val="A4A3A4"/>
+          </p15:clr>
+        </p15:guide>
+        <p15:guide id="2" pos="3840" userDrawn="1">
+          <p15:clr>
+            <a:srgbClr val="A4A3A4"/>
+          </p15:clr>
+        </p15:guide>
+      </p15:sldGuideLst>
+    </p:ext>
+  </p:extLst>
 </p:presentation>
 </file>
 
@@ -139,8 +163,8 @@
         </p:nvSpPr>
         <p:spPr>
           <a:xfrm>
-            <a:off x="685800" y="2130425"/>
-            <a:ext cx="7772400" cy="1470025"/>
+            <a:off x="914400" y="2130426"/>
+            <a:ext cx="10363200" cy="1470025"/>
           </a:xfrm>
         </p:spPr>
         <p:txBody>
@@ -148,10 +172,9 @@
           <a:lstStyle/>
           <a:p>
             <a:r>
-              <a:rPr lang="zh-TW" altLang="en-US" smtClean="0"/>
+              <a:rPr lang="zh-TW" altLang="en-US"/>
               <a:t>按一下以編輯母片標題樣式</a:t>
             </a:r>
-            <a:endParaRPr lang="zh-TW" altLang="en-US"/>
           </a:p>
         </p:txBody>
       </p:sp>
@@ -167,8 +190,8 @@
         </p:nvSpPr>
         <p:spPr>
           <a:xfrm>
-            <a:off x="1371600" y="3886200"/>
-            <a:ext cx="6400800" cy="1752600"/>
+            <a:off x="1828800" y="3886200"/>
+            <a:ext cx="8534400" cy="1752600"/>
           </a:xfrm>
         </p:spPr>
         <p:txBody>
@@ -267,10 +290,9 @@
           </a:lstStyle>
           <a:p>
             <a:r>
-              <a:rPr lang="zh-TW" altLang="en-US" smtClean="0"/>
+              <a:rPr lang="zh-TW" altLang="en-US"/>
               <a:t>按一下以編輯母片副標題樣式</a:t>
             </a:r>
-            <a:endParaRPr lang="zh-TW" altLang="en-US"/>
           </a:p>
         </p:txBody>
       </p:sp>
@@ -292,7 +314,7 @@
             <a:fld id="{2437B2B0-B323-41DD-ADE4-F7D8258986F2}" type="datetimeFigureOut">
               <a:rPr lang="en-US" smtClean="0"/>
               <a:pPr/>
-              <a:t>11/14/2017</a:t>
+              <a:t>12/30/2024</a:t>
             </a:fld>
             <a:endParaRPr lang="en-US"/>
           </a:p>
@@ -382,10 +404,9 @@
           <a:lstStyle/>
           <a:p>
             <a:r>
-              <a:rPr lang="zh-TW" altLang="en-US" smtClean="0"/>
+              <a:rPr lang="zh-TW" altLang="en-US"/>
               <a:t>按一下以編輯母片標題樣式</a:t>
             </a:r>
-            <a:endParaRPr lang="zh-TW" altLang="en-US"/>
           </a:p>
         </p:txBody>
       </p:sp>
@@ -406,38 +427,37 @@
           <a:p>
             <a:pPr lvl="0"/>
             <a:r>
-              <a:rPr lang="zh-TW" altLang="en-US" smtClean="0"/>
+              <a:rPr lang="zh-TW" altLang="en-US"/>
               <a:t>按一下以編輯母片文字樣式</a:t>
             </a:r>
           </a:p>
           <a:p>
             <a:pPr lvl="1"/>
             <a:r>
-              <a:rPr lang="zh-TW" altLang="en-US" smtClean="0"/>
+              <a:rPr lang="zh-TW" altLang="en-US"/>
               <a:t>第二層</a:t>
             </a:r>
           </a:p>
           <a:p>
             <a:pPr lvl="2"/>
             <a:r>
-              <a:rPr lang="zh-TW" altLang="en-US" smtClean="0"/>
+              <a:rPr lang="zh-TW" altLang="en-US"/>
               <a:t>第三層</a:t>
             </a:r>
           </a:p>
           <a:p>
             <a:pPr lvl="3"/>
             <a:r>
-              <a:rPr lang="zh-TW" altLang="en-US" smtClean="0"/>
+              <a:rPr lang="zh-TW" altLang="en-US"/>
               <a:t>第四層</a:t>
             </a:r>
           </a:p>
           <a:p>
             <a:pPr lvl="4"/>
             <a:r>
-              <a:rPr lang="zh-TW" altLang="en-US" smtClean="0"/>
+              <a:rPr lang="zh-TW" altLang="en-US"/>
               <a:t>第五層</a:t>
             </a:r>
-            <a:endParaRPr lang="zh-TW" altLang="en-US"/>
           </a:p>
         </p:txBody>
       </p:sp>
@@ -459,7 +479,7 @@
             <a:fld id="{2437B2B0-B323-41DD-ADE4-F7D8258986F2}" type="datetimeFigureOut">
               <a:rPr lang="en-US" smtClean="0"/>
               <a:pPr/>
-              <a:t>11/14/2017</a:t>
+              <a:t>12/30/2024</a:t>
             </a:fld>
             <a:endParaRPr lang="en-US"/>
           </a:p>
@@ -545,8 +565,8 @@
         </p:nvSpPr>
         <p:spPr>
           <a:xfrm>
-            <a:off x="6629400" y="274638"/>
-            <a:ext cx="2057400" cy="5851525"/>
+            <a:off x="8839200" y="274639"/>
+            <a:ext cx="2743200" cy="5851525"/>
           </a:xfrm>
         </p:spPr>
         <p:txBody>
@@ -554,10 +574,9 @@
           <a:lstStyle/>
           <a:p>
             <a:r>
-              <a:rPr lang="zh-TW" altLang="en-US" smtClean="0"/>
+              <a:rPr lang="zh-TW" altLang="en-US"/>
               <a:t>按一下以編輯母片標題樣式</a:t>
             </a:r>
-            <a:endParaRPr lang="zh-TW" altLang="en-US"/>
           </a:p>
         </p:txBody>
       </p:sp>
@@ -573,8 +592,8 @@
         </p:nvSpPr>
         <p:spPr>
           <a:xfrm>
-            <a:off x="457200" y="274638"/>
-            <a:ext cx="6019800" cy="5851525"/>
+            <a:off x="609600" y="274639"/>
+            <a:ext cx="8026400" cy="5851525"/>
           </a:xfrm>
         </p:spPr>
         <p:txBody>
@@ -583,38 +602,37 @@
           <a:p>
             <a:pPr lvl="0"/>
             <a:r>
-              <a:rPr lang="zh-TW" altLang="en-US" smtClean="0"/>
+              <a:rPr lang="zh-TW" altLang="en-US"/>
               <a:t>按一下以編輯母片文字樣式</a:t>
             </a:r>
           </a:p>
           <a:p>
             <a:pPr lvl="1"/>
             <a:r>
-              <a:rPr lang="zh-TW" altLang="en-US" smtClean="0"/>
+              <a:rPr lang="zh-TW" altLang="en-US"/>
               <a:t>第二層</a:t>
             </a:r>
           </a:p>
           <a:p>
             <a:pPr lvl="2"/>
             <a:r>
-              <a:rPr lang="zh-TW" altLang="en-US" smtClean="0"/>
+              <a:rPr lang="zh-TW" altLang="en-US"/>
               <a:t>第三層</a:t>
             </a:r>
           </a:p>
           <a:p>
             <a:pPr lvl="3"/>
             <a:r>
-              <a:rPr lang="zh-TW" altLang="en-US" smtClean="0"/>
+              <a:rPr lang="zh-TW" altLang="en-US"/>
               <a:t>第四層</a:t>
             </a:r>
           </a:p>
           <a:p>
             <a:pPr lvl="4"/>
             <a:r>
-              <a:rPr lang="zh-TW" altLang="en-US" smtClean="0"/>
+              <a:rPr lang="zh-TW" altLang="en-US"/>
               <a:t>第五層</a:t>
             </a:r>
-            <a:endParaRPr lang="zh-TW" altLang="en-US"/>
           </a:p>
         </p:txBody>
       </p:sp>
@@ -636,7 +654,7 @@
             <a:fld id="{2437B2B0-B323-41DD-ADE4-F7D8258986F2}" type="datetimeFigureOut">
               <a:rPr lang="en-US" smtClean="0"/>
               <a:pPr/>
-              <a:t>11/14/2017</a:t>
+              <a:t>12/30/2024</a:t>
             </a:fld>
             <a:endParaRPr lang="en-US"/>
           </a:p>
@@ -726,10 +744,9 @@
           <a:lstStyle/>
           <a:p>
             <a:r>
-              <a:rPr lang="zh-TW" altLang="en-US" smtClean="0"/>
+              <a:rPr lang="zh-TW" altLang="en-US"/>
               <a:t>按一下以編輯母片標題樣式</a:t>
             </a:r>
-            <a:endParaRPr lang="zh-TW" altLang="en-US"/>
           </a:p>
         </p:txBody>
       </p:sp>
@@ -750,38 +767,37 @@
           <a:p>
             <a:pPr lvl="0"/>
             <a:r>
-              <a:rPr lang="zh-TW" altLang="en-US" smtClean="0"/>
+              <a:rPr lang="zh-TW" altLang="en-US"/>
               <a:t>按一下以編輯母片文字樣式</a:t>
             </a:r>
           </a:p>
           <a:p>
             <a:pPr lvl="1"/>
             <a:r>
-              <a:rPr lang="zh-TW" altLang="en-US" smtClean="0"/>
+              <a:rPr lang="zh-TW" altLang="en-US"/>
               <a:t>第二層</a:t>
             </a:r>
           </a:p>
           <a:p>
             <a:pPr lvl="2"/>
             <a:r>
-              <a:rPr lang="zh-TW" altLang="en-US" smtClean="0"/>
+              <a:rPr lang="zh-TW" altLang="en-US"/>
               <a:t>第三層</a:t>
             </a:r>
           </a:p>
           <a:p>
             <a:pPr lvl="3"/>
             <a:r>
-              <a:rPr lang="zh-TW" altLang="en-US" smtClean="0"/>
+              <a:rPr lang="zh-TW" altLang="en-US"/>
               <a:t>第四層</a:t>
             </a:r>
           </a:p>
           <a:p>
             <a:pPr lvl="4"/>
             <a:r>
-              <a:rPr lang="zh-TW" altLang="en-US" smtClean="0"/>
+              <a:rPr lang="zh-TW" altLang="en-US"/>
               <a:t>第五層</a:t>
             </a:r>
-            <a:endParaRPr lang="zh-TW" altLang="en-US"/>
           </a:p>
         </p:txBody>
       </p:sp>
@@ -803,7 +819,7 @@
             <a:fld id="{2437B2B0-B323-41DD-ADE4-F7D8258986F2}" type="datetimeFigureOut">
               <a:rPr lang="en-US" smtClean="0"/>
               <a:pPr/>
-              <a:t>11/14/2017</a:t>
+              <a:t>12/30/2024</a:t>
             </a:fld>
             <a:endParaRPr lang="en-US"/>
           </a:p>
@@ -889,8 +905,8 @@
         </p:nvSpPr>
         <p:spPr>
           <a:xfrm>
-            <a:off x="722313" y="4406900"/>
-            <a:ext cx="7772400" cy="1362075"/>
+            <a:off x="963084" y="4406901"/>
+            <a:ext cx="10363200" cy="1362075"/>
           </a:xfrm>
         </p:spPr>
         <p:txBody>
@@ -902,10 +918,9 @@
           </a:lstStyle>
           <a:p>
             <a:r>
-              <a:rPr lang="zh-TW" altLang="en-US" smtClean="0"/>
+              <a:rPr lang="zh-TW" altLang="en-US"/>
               <a:t>按一下以編輯母片標題樣式</a:t>
             </a:r>
-            <a:endParaRPr lang="zh-TW" altLang="en-US"/>
           </a:p>
         </p:txBody>
       </p:sp>
@@ -921,8 +936,8 @@
         </p:nvSpPr>
         <p:spPr>
           <a:xfrm>
-            <a:off x="722313" y="2906713"/>
-            <a:ext cx="7772400" cy="1500187"/>
+            <a:off x="963084" y="2906713"/>
+            <a:ext cx="10363200" cy="1500187"/>
           </a:xfrm>
         </p:spPr>
         <p:txBody>
@@ -1022,7 +1037,7 @@
           <a:p>
             <a:pPr lvl="0"/>
             <a:r>
-              <a:rPr lang="zh-TW" altLang="en-US" smtClean="0"/>
+              <a:rPr lang="zh-TW" altLang="en-US"/>
               <a:t>按一下以編輯母片文字樣式</a:t>
             </a:r>
           </a:p>
@@ -1046,7 +1061,7 @@
             <a:fld id="{2437B2B0-B323-41DD-ADE4-F7D8258986F2}" type="datetimeFigureOut">
               <a:rPr lang="en-US" smtClean="0"/>
               <a:pPr/>
-              <a:t>11/14/2017</a:t>
+              <a:t>12/30/2024</a:t>
             </a:fld>
             <a:endParaRPr lang="en-US"/>
           </a:p>
@@ -1136,10 +1151,9 @@
           <a:lstStyle/>
           <a:p>
             <a:r>
-              <a:rPr lang="zh-TW" altLang="en-US" smtClean="0"/>
+              <a:rPr lang="zh-TW" altLang="en-US"/>
               <a:t>按一下以編輯母片標題樣式</a:t>
             </a:r>
-            <a:endParaRPr lang="zh-TW" altLang="en-US"/>
           </a:p>
         </p:txBody>
       </p:sp>
@@ -1155,8 +1169,8 @@
         </p:nvSpPr>
         <p:spPr>
           <a:xfrm>
-            <a:off x="457200" y="1600200"/>
-            <a:ext cx="4038600" cy="4525963"/>
+            <a:off x="609600" y="1600201"/>
+            <a:ext cx="5384800" cy="4525963"/>
           </a:xfrm>
         </p:spPr>
         <p:txBody>
@@ -1193,38 +1207,37 @@
           <a:p>
             <a:pPr lvl="0"/>
             <a:r>
-              <a:rPr lang="zh-TW" altLang="en-US" smtClean="0"/>
+              <a:rPr lang="zh-TW" altLang="en-US"/>
               <a:t>按一下以編輯母片文字樣式</a:t>
             </a:r>
           </a:p>
           <a:p>
             <a:pPr lvl="1"/>
             <a:r>
-              <a:rPr lang="zh-TW" altLang="en-US" smtClean="0"/>
+              <a:rPr lang="zh-TW" altLang="en-US"/>
               <a:t>第二層</a:t>
             </a:r>
           </a:p>
           <a:p>
             <a:pPr lvl="2"/>
             <a:r>
-              <a:rPr lang="zh-TW" altLang="en-US" smtClean="0"/>
+              <a:rPr lang="zh-TW" altLang="en-US"/>
               <a:t>第三層</a:t>
             </a:r>
           </a:p>
           <a:p>
             <a:pPr lvl="3"/>
             <a:r>
-              <a:rPr lang="zh-TW" altLang="en-US" smtClean="0"/>
+              <a:rPr lang="zh-TW" altLang="en-US"/>
               <a:t>第四層</a:t>
             </a:r>
           </a:p>
           <a:p>
             <a:pPr lvl="4"/>
             <a:r>
-              <a:rPr lang="zh-TW" altLang="en-US" smtClean="0"/>
+              <a:rPr lang="zh-TW" altLang="en-US"/>
               <a:t>第五層</a:t>
             </a:r>
-            <a:endParaRPr lang="zh-TW" altLang="en-US"/>
           </a:p>
         </p:txBody>
       </p:sp>
@@ -1240,8 +1253,8 @@
         </p:nvSpPr>
         <p:spPr>
           <a:xfrm>
-            <a:off x="4648200" y="1600200"/>
-            <a:ext cx="4038600" cy="4525963"/>
+            <a:off x="6197600" y="1600201"/>
+            <a:ext cx="5384800" cy="4525963"/>
           </a:xfrm>
         </p:spPr>
         <p:txBody>
@@ -1278,38 +1291,37 @@
           <a:p>
             <a:pPr lvl="0"/>
             <a:r>
-              <a:rPr lang="zh-TW" altLang="en-US" smtClean="0"/>
+              <a:rPr lang="zh-TW" altLang="en-US"/>
               <a:t>按一下以編輯母片文字樣式</a:t>
             </a:r>
           </a:p>
           <a:p>
             <a:pPr lvl="1"/>
             <a:r>
-              <a:rPr lang="zh-TW" altLang="en-US" smtClean="0"/>
+              <a:rPr lang="zh-TW" altLang="en-US"/>
               <a:t>第二層</a:t>
             </a:r>
           </a:p>
           <a:p>
             <a:pPr lvl="2"/>
             <a:r>
-              <a:rPr lang="zh-TW" altLang="en-US" smtClean="0"/>
+              <a:rPr lang="zh-TW" altLang="en-US"/>
               <a:t>第三層</a:t>
             </a:r>
           </a:p>
           <a:p>
             <a:pPr lvl="3"/>
             <a:r>
-              <a:rPr lang="zh-TW" altLang="en-US" smtClean="0"/>
+              <a:rPr lang="zh-TW" altLang="en-US"/>
               <a:t>第四層</a:t>
             </a:r>
           </a:p>
           <a:p>
             <a:pPr lvl="4"/>
             <a:r>
-              <a:rPr lang="zh-TW" altLang="en-US" smtClean="0"/>
+              <a:rPr lang="zh-TW" altLang="en-US"/>
               <a:t>第五層</a:t>
             </a:r>
-            <a:endParaRPr lang="zh-TW" altLang="en-US"/>
           </a:p>
         </p:txBody>
       </p:sp>
@@ -1331,7 +1343,7 @@
             <a:fld id="{2437B2B0-B323-41DD-ADE4-F7D8258986F2}" type="datetimeFigureOut">
               <a:rPr lang="en-US" smtClean="0"/>
               <a:pPr/>
-              <a:t>11/14/2017</a:t>
+              <a:t>12/30/2024</a:t>
             </a:fld>
             <a:endParaRPr lang="en-US"/>
           </a:p>
@@ -1425,10 +1437,9 @@
           </a:lstStyle>
           <a:p>
             <a:r>
-              <a:rPr lang="zh-TW" altLang="en-US" smtClean="0"/>
+              <a:rPr lang="zh-TW" altLang="en-US"/>
               <a:t>按一下以編輯母片標題樣式</a:t>
             </a:r>
-            <a:endParaRPr lang="zh-TW" altLang="en-US"/>
           </a:p>
         </p:txBody>
       </p:sp>
@@ -1444,8 +1455,8 @@
         </p:nvSpPr>
         <p:spPr>
           <a:xfrm>
-            <a:off x="457200" y="1535113"/>
-            <a:ext cx="4040188" cy="639762"/>
+            <a:off x="609600" y="1535113"/>
+            <a:ext cx="5386917" cy="639762"/>
           </a:xfrm>
         </p:spPr>
         <p:txBody>
@@ -1491,7 +1502,7 @@
           <a:p>
             <a:pPr lvl="0"/>
             <a:r>
-              <a:rPr lang="zh-TW" altLang="en-US" smtClean="0"/>
+              <a:rPr lang="zh-TW" altLang="en-US"/>
               <a:t>按一下以編輯母片文字樣式</a:t>
             </a:r>
           </a:p>
@@ -1509,8 +1520,8 @@
         </p:nvSpPr>
         <p:spPr>
           <a:xfrm>
-            <a:off x="457200" y="2174875"/>
-            <a:ext cx="4040188" cy="3951288"/>
+            <a:off x="609600" y="2174875"/>
+            <a:ext cx="5386917" cy="3951288"/>
           </a:xfrm>
         </p:spPr>
         <p:txBody>
@@ -1547,38 +1558,37 @@
           <a:p>
             <a:pPr lvl="0"/>
             <a:r>
-              <a:rPr lang="zh-TW" altLang="en-US" smtClean="0"/>
+              <a:rPr lang="zh-TW" altLang="en-US"/>
               <a:t>按一下以編輯母片文字樣式</a:t>
             </a:r>
           </a:p>
           <a:p>
             <a:pPr lvl="1"/>
             <a:r>
-              <a:rPr lang="zh-TW" altLang="en-US" smtClean="0"/>
+              <a:rPr lang="zh-TW" altLang="en-US"/>
               <a:t>第二層</a:t>
             </a:r>
           </a:p>
           <a:p>
             <a:pPr lvl="2"/>
             <a:r>
-              <a:rPr lang="zh-TW" altLang="en-US" smtClean="0"/>
+              <a:rPr lang="zh-TW" altLang="en-US"/>
               <a:t>第三層</a:t>
             </a:r>
           </a:p>
           <a:p>
             <a:pPr lvl="3"/>
             <a:r>
-              <a:rPr lang="zh-TW" altLang="en-US" smtClean="0"/>
+              <a:rPr lang="zh-TW" altLang="en-US"/>
               <a:t>第四層</a:t>
             </a:r>
           </a:p>
           <a:p>
             <a:pPr lvl="4"/>
             <a:r>
-              <a:rPr lang="zh-TW" altLang="en-US" smtClean="0"/>
+              <a:rPr lang="zh-TW" altLang="en-US"/>
               <a:t>第五層</a:t>
             </a:r>
-            <a:endParaRPr lang="zh-TW" altLang="en-US"/>
           </a:p>
         </p:txBody>
       </p:sp>
@@ -1594,8 +1604,8 @@
         </p:nvSpPr>
         <p:spPr>
           <a:xfrm>
-            <a:off x="4645025" y="1535113"/>
-            <a:ext cx="4041775" cy="639762"/>
+            <a:off x="6193368" y="1535113"/>
+            <a:ext cx="5389033" cy="639762"/>
           </a:xfrm>
         </p:spPr>
         <p:txBody>
@@ -1641,7 +1651,7 @@
           <a:p>
             <a:pPr lvl="0"/>
             <a:r>
-              <a:rPr lang="zh-TW" altLang="en-US" smtClean="0"/>
+              <a:rPr lang="zh-TW" altLang="en-US"/>
               <a:t>按一下以編輯母片文字樣式</a:t>
             </a:r>
           </a:p>
@@ -1659,8 +1669,8 @@
         </p:nvSpPr>
         <p:spPr>
           <a:xfrm>
-            <a:off x="4645025" y="2174875"/>
-            <a:ext cx="4041775" cy="3951288"/>
+            <a:off x="6193368" y="2174875"/>
+            <a:ext cx="5389033" cy="3951288"/>
           </a:xfrm>
         </p:spPr>
         <p:txBody>
@@ -1697,38 +1707,37 @@
           <a:p>
             <a:pPr lvl="0"/>
             <a:r>
-              <a:rPr lang="zh-TW" altLang="en-US" smtClean="0"/>
+              <a:rPr lang="zh-TW" altLang="en-US"/>
               <a:t>按一下以編輯母片文字樣式</a:t>
             </a:r>
           </a:p>
           <a:p>
             <a:pPr lvl="1"/>
             <a:r>
-              <a:rPr lang="zh-TW" altLang="en-US" smtClean="0"/>
+              <a:rPr lang="zh-TW" altLang="en-US"/>
               <a:t>第二層</a:t>
             </a:r>
           </a:p>
           <a:p>
             <a:pPr lvl="2"/>
             <a:r>
-              <a:rPr lang="zh-TW" altLang="en-US" smtClean="0"/>
+              <a:rPr lang="zh-TW" altLang="en-US"/>
               <a:t>第三層</a:t>
             </a:r>
           </a:p>
           <a:p>
             <a:pPr lvl="3"/>
             <a:r>
-              <a:rPr lang="zh-TW" altLang="en-US" smtClean="0"/>
+              <a:rPr lang="zh-TW" altLang="en-US"/>
               <a:t>第四層</a:t>
             </a:r>
           </a:p>
           <a:p>
             <a:pPr lvl="4"/>
             <a:r>
-              <a:rPr lang="zh-TW" altLang="en-US" smtClean="0"/>
+              <a:rPr lang="zh-TW" altLang="en-US"/>
               <a:t>第五層</a:t>
             </a:r>
-            <a:endParaRPr lang="zh-TW" altLang="en-US"/>
           </a:p>
         </p:txBody>
       </p:sp>
@@ -1750,7 +1759,7 @@
             <a:fld id="{2437B2B0-B323-41DD-ADE4-F7D8258986F2}" type="datetimeFigureOut">
               <a:rPr lang="en-US" smtClean="0"/>
               <a:pPr/>
-              <a:t>11/14/2017</a:t>
+              <a:t>12/30/2024</a:t>
             </a:fld>
             <a:endParaRPr lang="en-US"/>
           </a:p>
@@ -1840,10 +1849,9 @@
           <a:lstStyle/>
           <a:p>
             <a:r>
-              <a:rPr lang="zh-TW" altLang="en-US" smtClean="0"/>
+              <a:rPr lang="zh-TW" altLang="en-US"/>
               <a:t>按一下以編輯母片標題樣式</a:t>
             </a:r>
-            <a:endParaRPr lang="zh-TW" altLang="en-US"/>
           </a:p>
         </p:txBody>
       </p:sp>
@@ -1865,7 +1873,7 @@
             <a:fld id="{2437B2B0-B323-41DD-ADE4-F7D8258986F2}" type="datetimeFigureOut">
               <a:rPr lang="en-US" smtClean="0"/>
               <a:pPr/>
-              <a:t>11/14/2017</a:t>
+              <a:t>12/30/2024</a:t>
             </a:fld>
             <a:endParaRPr lang="en-US"/>
           </a:p>
@@ -1957,7 +1965,7 @@
             <a:fld id="{2437B2B0-B323-41DD-ADE4-F7D8258986F2}" type="datetimeFigureOut">
               <a:rPr lang="en-US" smtClean="0"/>
               <a:pPr/>
-              <a:t>11/14/2017</a:t>
+              <a:t>12/30/2024</a:t>
             </a:fld>
             <a:endParaRPr lang="en-US"/>
           </a:p>
@@ -2043,8 +2051,8 @@
         </p:nvSpPr>
         <p:spPr>
           <a:xfrm>
-            <a:off x="457200" y="273050"/>
-            <a:ext cx="3008313" cy="1162050"/>
+            <a:off x="609601" y="273050"/>
+            <a:ext cx="4011084" cy="1162050"/>
           </a:xfrm>
         </p:spPr>
         <p:txBody>
@@ -2056,10 +2064,9 @@
           </a:lstStyle>
           <a:p>
             <a:r>
-              <a:rPr lang="zh-TW" altLang="en-US" smtClean="0"/>
+              <a:rPr lang="zh-TW" altLang="en-US"/>
               <a:t>按一下以編輯母片標題樣式</a:t>
             </a:r>
-            <a:endParaRPr lang="zh-TW" altLang="en-US"/>
           </a:p>
         </p:txBody>
       </p:sp>
@@ -2075,8 +2082,8 @@
         </p:nvSpPr>
         <p:spPr>
           <a:xfrm>
-            <a:off x="3575050" y="273050"/>
-            <a:ext cx="5111750" cy="5853113"/>
+            <a:off x="4766733" y="273051"/>
+            <a:ext cx="6815667" cy="5853113"/>
           </a:xfrm>
         </p:spPr>
         <p:txBody>
@@ -2113,38 +2120,37 @@
           <a:p>
             <a:pPr lvl="0"/>
             <a:r>
-              <a:rPr lang="zh-TW" altLang="en-US" smtClean="0"/>
+              <a:rPr lang="zh-TW" altLang="en-US"/>
               <a:t>按一下以編輯母片文字樣式</a:t>
             </a:r>
           </a:p>
           <a:p>
             <a:pPr lvl="1"/>
             <a:r>
-              <a:rPr lang="zh-TW" altLang="en-US" smtClean="0"/>
+              <a:rPr lang="zh-TW" altLang="en-US"/>
               <a:t>第二層</a:t>
             </a:r>
           </a:p>
           <a:p>
             <a:pPr lvl="2"/>
             <a:r>
-              <a:rPr lang="zh-TW" altLang="en-US" smtClean="0"/>
+              <a:rPr lang="zh-TW" altLang="en-US"/>
               <a:t>第三層</a:t>
             </a:r>
           </a:p>
           <a:p>
             <a:pPr lvl="3"/>
             <a:r>
-              <a:rPr lang="zh-TW" altLang="en-US" smtClean="0"/>
+              <a:rPr lang="zh-TW" altLang="en-US"/>
               <a:t>第四層</a:t>
             </a:r>
           </a:p>
           <a:p>
             <a:pPr lvl="4"/>
             <a:r>
-              <a:rPr lang="zh-TW" altLang="en-US" smtClean="0"/>
+              <a:rPr lang="zh-TW" altLang="en-US"/>
               <a:t>第五層</a:t>
             </a:r>
-            <a:endParaRPr lang="zh-TW" altLang="en-US"/>
           </a:p>
         </p:txBody>
       </p:sp>
@@ -2160,8 +2166,8 @@
         </p:nvSpPr>
         <p:spPr>
           <a:xfrm>
-            <a:off x="457200" y="1435100"/>
-            <a:ext cx="3008313" cy="4691063"/>
+            <a:off x="609601" y="1435101"/>
+            <a:ext cx="4011084" cy="4691063"/>
           </a:xfrm>
         </p:spPr>
         <p:txBody>
@@ -2207,7 +2213,7 @@
           <a:p>
             <a:pPr lvl="0"/>
             <a:r>
-              <a:rPr lang="zh-TW" altLang="en-US" smtClean="0"/>
+              <a:rPr lang="zh-TW" altLang="en-US"/>
               <a:t>按一下以編輯母片文字樣式</a:t>
             </a:r>
           </a:p>
@@ -2231,7 +2237,7 @@
             <a:fld id="{2437B2B0-B323-41DD-ADE4-F7D8258986F2}" type="datetimeFigureOut">
               <a:rPr lang="en-US" smtClean="0"/>
               <a:pPr/>
-              <a:t>11/14/2017</a:t>
+              <a:t>12/30/2024</a:t>
             </a:fld>
             <a:endParaRPr lang="en-US"/>
           </a:p>
@@ -2317,8 +2323,8 @@
         </p:nvSpPr>
         <p:spPr>
           <a:xfrm>
-            <a:off x="1792288" y="4800600"/>
-            <a:ext cx="5486400" cy="566738"/>
+            <a:off x="2389717" y="4800600"/>
+            <a:ext cx="7315200" cy="566738"/>
           </a:xfrm>
         </p:spPr>
         <p:txBody>
@@ -2330,10 +2336,9 @@
           </a:lstStyle>
           <a:p>
             <a:r>
-              <a:rPr lang="zh-TW" altLang="en-US" smtClean="0"/>
+              <a:rPr lang="zh-TW" altLang="en-US"/>
               <a:t>按一下以編輯母片標題樣式</a:t>
             </a:r>
-            <a:endParaRPr lang="zh-TW" altLang="en-US"/>
           </a:p>
         </p:txBody>
       </p:sp>
@@ -2349,8 +2354,8 @@
         </p:nvSpPr>
         <p:spPr>
           <a:xfrm>
-            <a:off x="1792288" y="612775"/>
-            <a:ext cx="5486400" cy="4114800"/>
+            <a:off x="2389717" y="612775"/>
+            <a:ext cx="7315200" cy="4114800"/>
           </a:xfrm>
         </p:spPr>
         <p:txBody>
@@ -2395,10 +2400,9 @@
           </a:lstStyle>
           <a:p>
             <a:r>
-              <a:rPr lang="zh-TW" altLang="en-US" smtClean="0"/>
+              <a:rPr lang="zh-TW" altLang="en-US"/>
               <a:t>按一下圖示以新增圖片</a:t>
             </a:r>
-            <a:endParaRPr lang="zh-TW" altLang="en-US"/>
           </a:p>
         </p:txBody>
       </p:sp>
@@ -2414,8 +2418,8 @@
         </p:nvSpPr>
         <p:spPr>
           <a:xfrm>
-            <a:off x="1792288" y="5367338"/>
-            <a:ext cx="5486400" cy="804862"/>
+            <a:off x="2389717" y="5367338"/>
+            <a:ext cx="7315200" cy="804862"/>
           </a:xfrm>
         </p:spPr>
         <p:txBody>
@@ -2461,7 +2465,7 @@
           <a:p>
             <a:pPr lvl="0"/>
             <a:r>
-              <a:rPr lang="zh-TW" altLang="en-US" smtClean="0"/>
+              <a:rPr lang="zh-TW" altLang="en-US"/>
               <a:t>按一下以編輯母片文字樣式</a:t>
             </a:r>
           </a:p>
@@ -2485,7 +2489,7 @@
             <a:fld id="{2437B2B0-B323-41DD-ADE4-F7D8258986F2}" type="datetimeFigureOut">
               <a:rPr lang="en-US" smtClean="0"/>
               <a:pPr/>
-              <a:t>11/14/2017</a:t>
+              <a:t>12/30/2024</a:t>
             </a:fld>
             <a:endParaRPr lang="en-US"/>
           </a:p>
@@ -2581,8 +2585,8 @@
         </p:nvSpPr>
         <p:spPr>
           <a:xfrm>
-            <a:off x="457200" y="274638"/>
-            <a:ext cx="8229600" cy="1143000"/>
+            <a:off x="609600" y="274638"/>
+            <a:ext cx="10972800" cy="1143000"/>
           </a:xfrm>
           <a:prstGeom prst="rect">
             <a:avLst/>
@@ -2595,10 +2599,9 @@
           <a:lstStyle/>
           <a:p>
             <a:r>
-              <a:rPr lang="zh-TW" altLang="en-US" smtClean="0"/>
+              <a:rPr lang="zh-TW" altLang="en-US"/>
               <a:t>按一下以編輯母片標題樣式</a:t>
             </a:r>
-            <a:endParaRPr lang="zh-TW" altLang="en-US"/>
           </a:p>
         </p:txBody>
       </p:sp>
@@ -2614,8 +2617,8 @@
         </p:nvSpPr>
         <p:spPr>
           <a:xfrm>
-            <a:off x="457200" y="1600200"/>
-            <a:ext cx="8229600" cy="4525963"/>
+            <a:off x="609600" y="1600201"/>
+            <a:ext cx="10972800" cy="4525963"/>
           </a:xfrm>
           <a:prstGeom prst="rect">
             <a:avLst/>
@@ -2629,38 +2632,37 @@
           <a:p>
             <a:pPr lvl="0"/>
             <a:r>
-              <a:rPr lang="zh-TW" altLang="en-US" smtClean="0"/>
+              <a:rPr lang="zh-TW" altLang="en-US"/>
               <a:t>按一下以編輯母片文字樣式</a:t>
             </a:r>
           </a:p>
           <a:p>
             <a:pPr lvl="1"/>
             <a:r>
-              <a:rPr lang="zh-TW" altLang="en-US" smtClean="0"/>
+              <a:rPr lang="zh-TW" altLang="en-US"/>
               <a:t>第二層</a:t>
             </a:r>
           </a:p>
           <a:p>
             <a:pPr lvl="2"/>
             <a:r>
-              <a:rPr lang="zh-TW" altLang="en-US" smtClean="0"/>
+              <a:rPr lang="zh-TW" altLang="en-US"/>
               <a:t>第三層</a:t>
             </a:r>
           </a:p>
           <a:p>
             <a:pPr lvl="3"/>
             <a:r>
-              <a:rPr lang="zh-TW" altLang="en-US" smtClean="0"/>
+              <a:rPr lang="zh-TW" altLang="en-US"/>
               <a:t>第四層</a:t>
             </a:r>
           </a:p>
           <a:p>
             <a:pPr lvl="4"/>
             <a:r>
-              <a:rPr lang="zh-TW" altLang="en-US" smtClean="0"/>
+              <a:rPr lang="zh-TW" altLang="en-US"/>
               <a:t>第五層</a:t>
             </a:r>
-            <a:endParaRPr lang="zh-TW" altLang="en-US"/>
           </a:p>
         </p:txBody>
       </p:sp>
@@ -2676,8 +2678,8 @@
         </p:nvSpPr>
         <p:spPr>
           <a:xfrm>
-            <a:off x="457200" y="6356350"/>
-            <a:ext cx="2133600" cy="365125"/>
+            <a:off x="609600" y="6356351"/>
+            <a:ext cx="2844800" cy="365125"/>
           </a:xfrm>
           <a:prstGeom prst="rect">
             <a:avLst/>
@@ -2700,7 +2702,7 @@
             <a:fld id="{2437B2B0-B323-41DD-ADE4-F7D8258986F2}" type="datetimeFigureOut">
               <a:rPr lang="en-US" smtClean="0"/>
               <a:pPr/>
-              <a:t>11/14/2017</a:t>
+              <a:t>12/30/2024</a:t>
             </a:fld>
             <a:endParaRPr lang="en-US"/>
           </a:p>
@@ -2718,8 +2720,8 @@
         </p:nvSpPr>
         <p:spPr>
           <a:xfrm>
-            <a:off x="3124200" y="6356350"/>
-            <a:ext cx="2895600" cy="365125"/>
+            <a:off x="4165600" y="6356351"/>
+            <a:ext cx="3860800" cy="365125"/>
           </a:xfrm>
           <a:prstGeom prst="rect">
             <a:avLst/>
@@ -2755,8 +2757,8 @@
         </p:nvSpPr>
         <p:spPr>
           <a:xfrm>
-            <a:off x="6553200" y="6356350"/>
-            <a:ext cx="2133600" cy="365125"/>
+            <a:off x="8737600" y="6356351"/>
+            <a:ext cx="2844800" cy="365125"/>
           </a:xfrm>
           <a:prstGeom prst="rect">
             <a:avLst/>
@@ -3059,7 +3061,13 @@
   <p:cSld>
     <p:spTree>
       <p:nvGrpSpPr>
-        <p:cNvPr id="1" name=""/>
+        <p:cNvPr id="1" name="">
+          <a:extLst>
+            <a:ext uri="{FF2B5EF4-FFF2-40B4-BE49-F238E27FC236}">
+              <a16:creationId xmlns:a16="http://schemas.microsoft.com/office/drawing/2014/main" id="{5F20F3D7-EDDF-CE30-9060-314A88E3730B}"/>
+            </a:ext>
+          </a:extLst>
+        </p:cNvPr>
         <p:cNvGrpSpPr/>
         <p:nvPr/>
       </p:nvGrpSpPr>
@@ -3073,47 +3081,24 @@
       </p:grpSpPr>
       <p:sp>
         <p:nvSpPr>
-          <p:cNvPr id="4" name="Title 3"/>
+          <p:cNvPr id="4" name="標題 3">
+            <a:extLst>
+              <a:ext uri="{FF2B5EF4-FFF2-40B4-BE49-F238E27FC236}">
+                <a16:creationId xmlns:a16="http://schemas.microsoft.com/office/drawing/2014/main" id="{CD6A41DD-B5E6-D530-EC0F-85726817D119}"/>
+              </a:ext>
+            </a:extLst>
+          </p:cNvPr>
           <p:cNvSpPr>
             <a:spLocks noGrp="1"/>
           </p:cNvSpPr>
           <p:nvPr>
             <p:ph type="title"/>
-          </p:nvPr>
-        </p:nvSpPr>
-        <p:spPr/>
-        <p:txBody>
-          <a:bodyPr/>
-          <a:lstStyle/>
-          <a:p>
-            <a:r>
-              <a:rPr lang="zh-CN" altLang="en-US" b="1" dirty="0">
-                <a:latin typeface="微軟正黑體" pitchFamily="34" charset="-120"/>
-                <a:ea typeface="微軟正黑體" pitchFamily="34" charset="-120"/>
-              </a:rPr>
-              <a:t>全因為你</a:t>
-            </a:r>
-            <a:endParaRPr lang="en-US" b="1" dirty="0">
-              <a:latin typeface="微軟正黑體" pitchFamily="34" charset="-120"/>
-              <a:ea typeface="微軟正黑體" pitchFamily="34" charset="-120"/>
-            </a:endParaRPr>
-          </a:p>
-        </p:txBody>
-      </p:sp>
-      <p:sp>
-        <p:nvSpPr>
-          <p:cNvPr id="5" name="Content Placeholder 4"/>
-          <p:cNvSpPr>
-            <a:spLocks noGrp="1"/>
-          </p:cNvSpPr>
-          <p:nvPr>
-            <p:ph idx="1"/>
           </p:nvPr>
         </p:nvSpPr>
         <p:spPr>
           <a:xfrm>
-            <a:off x="457200" y="1600200"/>
-            <a:ext cx="8229600" cy="5029200"/>
+            <a:off x="0" y="2660915"/>
+            <a:ext cx="12192000" cy="1143000"/>
           </a:xfrm>
         </p:spPr>
         <p:txBody>
@@ -3122,179 +3107,506 @@
           </a:bodyPr>
           <a:lstStyle/>
           <a:p>
-            <a:pPr algn="ctr">
-              <a:buNone/>
-            </a:pPr>
-            <a:r>
-              <a:rPr lang="zh-TW" altLang="en-US" sz="5400" b="1" dirty="0">
+            <a:r>
+              <a:rPr lang="zh-TW" altLang="en-US" sz="7200" b="1" i="1" dirty="0">
+                <a:solidFill>
+                  <a:srgbClr val="000066"/>
+                </a:solidFill>
+                <a:effectLst>
+                  <a:outerShdw blurRad="38100" dist="38100" dir="2700000" algn="tl">
+                    <a:srgbClr val="000000">
+                      <a:alpha val="43137"/>
+                    </a:srgbClr>
+                  </a:outerShdw>
+                </a:effectLst>
                 <a:latin typeface="微軟正黑體" pitchFamily="34" charset="-120"/>
                 <a:ea typeface="微軟正黑體" pitchFamily="34" charset="-120"/>
               </a:rPr>
-              <a:t>常言</a:t>
-            </a:r>
-            <a:r>
-              <a:rPr lang="zh-TW" altLang="en-US" sz="5400" b="1" dirty="0" smtClean="0">
+              <a:t>全因為祢</a:t>
+            </a:r>
+          </a:p>
+        </p:txBody>
+      </p:sp>
+    </p:spTree>
+    <p:extLst>
+      <p:ext uri="{BB962C8B-B14F-4D97-AF65-F5344CB8AC3E}">
+        <p14:creationId xmlns:p14="http://schemas.microsoft.com/office/powerpoint/2010/main" val="388492399"/>
+      </p:ext>
+    </p:extLst>
+  </p:cSld>
+  <p:clrMapOvr>
+    <a:masterClrMapping/>
+  </p:clrMapOvr>
+</p:sld>
+</file>
+
+<file path=ppt/slides/slide10.xml><?xml version="1.0" encoding="utf-8"?>
+<p:sld xmlns:a="http://schemas.openxmlformats.org/drawingml/2006/main" xmlns:r="http://schemas.openxmlformats.org/officeDocument/2006/relationships" xmlns:p="http://schemas.openxmlformats.org/presentationml/2006/main">
+  <p:cSld>
+    <p:spTree>
+      <p:nvGrpSpPr>
+        <p:cNvPr id="1" name="">
+          <a:extLst>
+            <a:ext uri="{FF2B5EF4-FFF2-40B4-BE49-F238E27FC236}">
+              <a16:creationId xmlns:a16="http://schemas.microsoft.com/office/drawing/2014/main" id="{AEB72CE5-314E-0B0C-A518-3D4C9602AFE1}"/>
+            </a:ext>
+          </a:extLst>
+        </p:cNvPr>
+        <p:cNvGrpSpPr/>
+        <p:nvPr/>
+      </p:nvGrpSpPr>
+      <p:grpSpPr>
+        <a:xfrm>
+          <a:off x="0" y="0"/>
+          <a:ext cx="0" cy="0"/>
+          <a:chOff x="0" y="0"/>
+          <a:chExt cx="0" cy="0"/>
+        </a:xfrm>
+      </p:grpSpPr>
+      <p:sp>
+        <p:nvSpPr>
+          <p:cNvPr id="5" name="內容版面配置區 4">
+            <a:extLst>
+              <a:ext uri="{FF2B5EF4-FFF2-40B4-BE49-F238E27FC236}">
+                <a16:creationId xmlns:a16="http://schemas.microsoft.com/office/drawing/2014/main" id="{E24B4B5F-20F4-AD4D-895F-4FCD31259B42}"/>
+              </a:ext>
+            </a:extLst>
+          </p:cNvPr>
+          <p:cNvSpPr>
+            <a:spLocks noGrp="1"/>
+          </p:cNvSpPr>
+          <p:nvPr>
+            <p:ph idx="1"/>
+          </p:nvPr>
+        </p:nvSpPr>
+        <p:spPr>
+          <a:xfrm>
+            <a:off x="0" y="2084851"/>
+            <a:ext cx="12192000" cy="2404863"/>
+          </a:xfrm>
+        </p:spPr>
+        <p:txBody>
+          <a:bodyPr anchor="ctr">
+            <a:normAutofit/>
+          </a:bodyPr>
+          <a:lstStyle/>
+          <a:p>
+            <a:pPr algn="ctr">
+              <a:buNone/>
+            </a:pPr>
+            <a:r>
+              <a:rPr lang="zh-TW" altLang="en-US" sz="6400" b="1" dirty="0">
+                <a:solidFill>
+                  <a:srgbClr val="000066"/>
+                </a:solidFill>
                 <a:latin typeface="微軟正黑體" pitchFamily="34" charset="-120"/>
                 <a:ea typeface="微軟正黑體" pitchFamily="34" charset="-120"/>
               </a:rPr>
-              <a:t>道  人</a:t>
-            </a:r>
-            <a:r>
-              <a:rPr lang="zh-TW" altLang="en-US" sz="5400" b="1" dirty="0">
+              <a:t>是祢令我如鷹般高飛</a:t>
+            </a:r>
+          </a:p>
+        </p:txBody>
+      </p:sp>
+      <p:sp>
+        <p:nvSpPr>
+          <p:cNvPr id="3" name="TextBox 2">
+            <a:extLst>
+              <a:ext uri="{FF2B5EF4-FFF2-40B4-BE49-F238E27FC236}">
+                <a16:creationId xmlns:a16="http://schemas.microsoft.com/office/drawing/2014/main" id="{EE0B3FB4-A609-B933-C816-BF38CEB8ECB2}"/>
+              </a:ext>
+            </a:extLst>
+          </p:cNvPr>
+          <p:cNvSpPr txBox="1"/>
+          <p:nvPr/>
+        </p:nvSpPr>
+        <p:spPr>
+          <a:xfrm>
+            <a:off x="0" y="5157193"/>
+            <a:ext cx="12192000" cy="584775"/>
+          </a:xfrm>
+          <a:prstGeom prst="rect">
+            <a:avLst/>
+          </a:prstGeom>
+          <a:noFill/>
+        </p:spPr>
+        <p:txBody>
+          <a:bodyPr wrap="square" rtlCol="0">
+            <a:spAutoFit/>
+          </a:bodyPr>
+          <a:lstStyle/>
+          <a:p>
+            <a:pPr algn="ctr"/>
+            <a:r>
+              <a:rPr lang="en-US" sz="3200" b="1" dirty="0">
+                <a:solidFill>
+                  <a:srgbClr val="000066"/>
+                </a:solidFill>
+                <a:latin typeface="Microsoft JhengHei" panose="020B0604030504040204" pitchFamily="34" charset="-120"/>
+                <a:ea typeface="Microsoft JhengHei" panose="020B0604030504040204" pitchFamily="34" charset="-120"/>
+              </a:rPr>
+              <a:t>( </a:t>
+            </a:r>
+            <a:r>
+              <a:rPr lang="zh-CN" altLang="en-US" sz="3200" b="1" dirty="0">
+                <a:solidFill>
+                  <a:srgbClr val="000066"/>
+                </a:solidFill>
+                <a:latin typeface="Microsoft JhengHei" panose="020B0604030504040204" pitchFamily="34" charset="-120"/>
+                <a:ea typeface="Microsoft JhengHei" panose="020B0604030504040204" pitchFamily="34" charset="-120"/>
+              </a:rPr>
+              <a:t>副歌</a:t>
+            </a:r>
+            <a:r>
+              <a:rPr lang="en-US" sz="3200" b="1" dirty="0">
+                <a:solidFill>
+                  <a:srgbClr val="000066"/>
+                </a:solidFill>
+                <a:latin typeface="Microsoft JhengHei" panose="020B0604030504040204" pitchFamily="34" charset="-120"/>
+                <a:ea typeface="Microsoft JhengHei" panose="020B0604030504040204" pitchFamily="34" charset="-120"/>
+              </a:rPr>
+              <a:t> )</a:t>
+            </a:r>
+            <a:endParaRPr lang="vi-VN" sz="3200" b="1" dirty="0">
+              <a:solidFill>
+                <a:srgbClr val="000066"/>
+              </a:solidFill>
+              <a:ea typeface="Microsoft JhengHei" panose="020B0604030504040204" pitchFamily="34" charset="-120"/>
+            </a:endParaRPr>
+          </a:p>
+        </p:txBody>
+      </p:sp>
+    </p:spTree>
+    <p:extLst>
+      <p:ext uri="{BB962C8B-B14F-4D97-AF65-F5344CB8AC3E}">
+        <p14:creationId xmlns:p14="http://schemas.microsoft.com/office/powerpoint/2010/main" val="1369836723"/>
+      </p:ext>
+    </p:extLst>
+  </p:cSld>
+  <p:clrMapOvr>
+    <a:masterClrMapping/>
+  </p:clrMapOvr>
+</p:sld>
+</file>
+
+<file path=ppt/slides/slide11.xml><?xml version="1.0" encoding="utf-8"?>
+<p:sld xmlns:a="http://schemas.openxmlformats.org/drawingml/2006/main" xmlns:r="http://schemas.openxmlformats.org/officeDocument/2006/relationships" xmlns:p="http://schemas.openxmlformats.org/presentationml/2006/main">
+  <p:cSld>
+    <p:spTree>
+      <p:nvGrpSpPr>
+        <p:cNvPr id="1" name="">
+          <a:extLst>
+            <a:ext uri="{FF2B5EF4-FFF2-40B4-BE49-F238E27FC236}">
+              <a16:creationId xmlns:a16="http://schemas.microsoft.com/office/drawing/2014/main" id="{464197E9-99AE-77DB-4155-F78AEB9D8C9D}"/>
+            </a:ext>
+          </a:extLst>
+        </p:cNvPr>
+        <p:cNvGrpSpPr/>
+        <p:nvPr/>
+      </p:nvGrpSpPr>
+      <p:grpSpPr>
+        <a:xfrm>
+          <a:off x="0" y="0"/>
+          <a:ext cx="0" cy="0"/>
+          <a:chOff x="0" y="0"/>
+          <a:chExt cx="0" cy="0"/>
+        </a:xfrm>
+      </p:grpSpPr>
+      <p:sp>
+        <p:nvSpPr>
+          <p:cNvPr id="5" name="內容版面配置區 4">
+            <a:extLst>
+              <a:ext uri="{FF2B5EF4-FFF2-40B4-BE49-F238E27FC236}">
+                <a16:creationId xmlns:a16="http://schemas.microsoft.com/office/drawing/2014/main" id="{43DC8EE8-0081-6655-F76F-B317B02D77B6}"/>
+              </a:ext>
+            </a:extLst>
+          </p:cNvPr>
+          <p:cNvSpPr>
+            <a:spLocks noGrp="1"/>
+          </p:cNvSpPr>
+          <p:nvPr>
+            <p:ph idx="1"/>
+          </p:nvPr>
+        </p:nvSpPr>
+        <p:spPr>
+          <a:xfrm>
+            <a:off x="0" y="2084851"/>
+            <a:ext cx="12192000" cy="2404863"/>
+          </a:xfrm>
+        </p:spPr>
+        <p:txBody>
+          <a:bodyPr anchor="ctr">
+            <a:normAutofit/>
+          </a:bodyPr>
+          <a:lstStyle/>
+          <a:p>
+            <a:pPr algn="ctr">
+              <a:buNone/>
+            </a:pPr>
+            <a:r>
+              <a:rPr lang="zh-TW" altLang="en-US" sz="6400" b="1" dirty="0">
+                <a:solidFill>
+                  <a:srgbClr val="000066"/>
+                </a:solidFill>
                 <a:latin typeface="微軟正黑體" pitchFamily="34" charset="-120"/>
                 <a:ea typeface="微軟正黑體" pitchFamily="34" charset="-120"/>
               </a:rPr>
-              <a:t>生像演</a:t>
-            </a:r>
-            <a:r>
-              <a:rPr lang="zh-TW" altLang="en-US" sz="5400" b="1" dirty="0" smtClean="0">
+              <a:t>全因為祢  令我一生都佳美</a:t>
+            </a:r>
+          </a:p>
+          <a:p>
+            <a:pPr algn="ctr">
+              <a:buNone/>
+            </a:pPr>
+            <a:r>
+              <a:rPr lang="zh-TW" altLang="en-US" sz="6400" b="1" dirty="0">
+                <a:solidFill>
+                  <a:srgbClr val="000066"/>
+                </a:solidFill>
                 <a:latin typeface="微軟正黑體" pitchFamily="34" charset="-120"/>
                 <a:ea typeface="微軟正黑體" pitchFamily="34" charset="-120"/>
               </a:rPr>
-              <a:t>戲</a:t>
-            </a:r>
-            <a:endParaRPr lang="en-US" altLang="zh-TW" sz="5400" b="1" dirty="0" smtClean="0">
-              <a:latin typeface="微軟正黑體" pitchFamily="34" charset="-120"/>
-              <a:ea typeface="微軟正黑體" pitchFamily="34" charset="-120"/>
+              <a:t>祢令我生命從空虛  化做傳奇</a:t>
+            </a:r>
+          </a:p>
+        </p:txBody>
+      </p:sp>
+      <p:sp>
+        <p:nvSpPr>
+          <p:cNvPr id="3" name="TextBox 2">
+            <a:extLst>
+              <a:ext uri="{FF2B5EF4-FFF2-40B4-BE49-F238E27FC236}">
+                <a16:creationId xmlns:a16="http://schemas.microsoft.com/office/drawing/2014/main" id="{C2A17A2E-1922-697B-99C5-FB57038E85CC}"/>
+              </a:ext>
+            </a:extLst>
+          </p:cNvPr>
+          <p:cNvSpPr txBox="1"/>
+          <p:nvPr/>
+        </p:nvSpPr>
+        <p:spPr>
+          <a:xfrm>
+            <a:off x="0" y="5157193"/>
+            <a:ext cx="12192000" cy="584775"/>
+          </a:xfrm>
+          <a:prstGeom prst="rect">
+            <a:avLst/>
+          </a:prstGeom>
+          <a:noFill/>
+        </p:spPr>
+        <p:txBody>
+          <a:bodyPr wrap="square" rtlCol="0">
+            <a:spAutoFit/>
+          </a:bodyPr>
+          <a:lstStyle/>
+          <a:p>
+            <a:pPr algn="ctr"/>
+            <a:r>
+              <a:rPr lang="en-US" sz="3200" b="1" dirty="0">
+                <a:solidFill>
+                  <a:srgbClr val="000066"/>
+                </a:solidFill>
+                <a:latin typeface="Microsoft JhengHei" panose="020B0604030504040204" pitchFamily="34" charset="-120"/>
+                <a:ea typeface="Microsoft JhengHei" panose="020B0604030504040204" pitchFamily="34" charset="-120"/>
+              </a:rPr>
+              <a:t>( </a:t>
+            </a:r>
+            <a:r>
+              <a:rPr lang="zh-CN" altLang="en-US" sz="3200" b="1" dirty="0">
+                <a:solidFill>
+                  <a:srgbClr val="000066"/>
+                </a:solidFill>
+                <a:latin typeface="Microsoft JhengHei" panose="020B0604030504040204" pitchFamily="34" charset="-120"/>
+                <a:ea typeface="Microsoft JhengHei" panose="020B0604030504040204" pitchFamily="34" charset="-120"/>
+              </a:rPr>
+              <a:t>副歌</a:t>
+            </a:r>
+            <a:r>
+              <a:rPr lang="en-US" sz="3200" b="1" dirty="0">
+                <a:solidFill>
+                  <a:srgbClr val="000066"/>
+                </a:solidFill>
+                <a:latin typeface="Microsoft JhengHei" panose="020B0604030504040204" pitchFamily="34" charset="-120"/>
+                <a:ea typeface="Microsoft JhengHei" panose="020B0604030504040204" pitchFamily="34" charset="-120"/>
+              </a:rPr>
+              <a:t> )</a:t>
+            </a:r>
+            <a:endParaRPr lang="vi-VN" sz="3200" b="1" dirty="0">
+              <a:solidFill>
+                <a:srgbClr val="000066"/>
+              </a:solidFill>
+              <a:ea typeface="Microsoft JhengHei" panose="020B0604030504040204" pitchFamily="34" charset="-120"/>
             </a:endParaRPr>
           </a:p>
+        </p:txBody>
+      </p:sp>
+    </p:spTree>
+    <p:extLst>
+      <p:ext uri="{BB962C8B-B14F-4D97-AF65-F5344CB8AC3E}">
+        <p14:creationId xmlns:p14="http://schemas.microsoft.com/office/powerpoint/2010/main" val="3195570411"/>
+      </p:ext>
+    </p:extLst>
+  </p:cSld>
+  <p:clrMapOvr>
+    <a:masterClrMapping/>
+  </p:clrMapOvr>
+</p:sld>
+</file>
+
+<file path=ppt/slides/slide12.xml><?xml version="1.0" encoding="utf-8"?>
+<p:sld xmlns:a="http://schemas.openxmlformats.org/drawingml/2006/main" xmlns:r="http://schemas.openxmlformats.org/officeDocument/2006/relationships" xmlns:p="http://schemas.openxmlformats.org/presentationml/2006/main">
+  <p:cSld>
+    <p:spTree>
+      <p:nvGrpSpPr>
+        <p:cNvPr id="1" name="">
+          <a:extLst>
+            <a:ext uri="{FF2B5EF4-FFF2-40B4-BE49-F238E27FC236}">
+              <a16:creationId xmlns:a16="http://schemas.microsoft.com/office/drawing/2014/main" id="{F3256E30-C0D9-70AE-05E5-5EAFFABE9E3B}"/>
+            </a:ext>
+          </a:extLst>
+        </p:cNvPr>
+        <p:cNvGrpSpPr/>
+        <p:nvPr/>
+      </p:nvGrpSpPr>
+      <p:grpSpPr>
+        <a:xfrm>
+          <a:off x="0" y="0"/>
+          <a:ext cx="0" cy="0"/>
+          <a:chOff x="0" y="0"/>
+          <a:chExt cx="0" cy="0"/>
+        </a:xfrm>
+      </p:grpSpPr>
+      <p:sp>
+        <p:nvSpPr>
+          <p:cNvPr id="5" name="內容版面配置區 4">
+            <a:extLst>
+              <a:ext uri="{FF2B5EF4-FFF2-40B4-BE49-F238E27FC236}">
+                <a16:creationId xmlns:a16="http://schemas.microsoft.com/office/drawing/2014/main" id="{1346715B-F430-AD8B-25A2-A38A5DF35423}"/>
+              </a:ext>
+            </a:extLst>
+          </p:cNvPr>
+          <p:cNvSpPr>
+            <a:spLocks noGrp="1"/>
+          </p:cNvSpPr>
+          <p:nvPr>
+            <p:ph idx="1"/>
+          </p:nvPr>
+        </p:nvSpPr>
+        <p:spPr>
+          <a:xfrm>
+            <a:off x="0" y="2084851"/>
+            <a:ext cx="12192000" cy="2404863"/>
+          </a:xfrm>
+        </p:spPr>
+        <p:txBody>
+          <a:bodyPr anchor="ctr">
+            <a:normAutofit/>
+          </a:bodyPr>
+          <a:lstStyle/>
           <a:p>
             <a:pPr algn="ctr">
               <a:buNone/>
             </a:pPr>
             <a:r>
-              <a:rPr lang="zh-TW" altLang="en-US" sz="5400" b="1" dirty="0" smtClean="0">
+              <a:rPr lang="zh-TW" altLang="en-US" sz="6400" b="1" dirty="0">
+                <a:solidFill>
+                  <a:srgbClr val="000066"/>
+                </a:solidFill>
                 <a:latin typeface="微軟正黑體" pitchFamily="34" charset="-120"/>
                 <a:ea typeface="微軟正黑體" pitchFamily="34" charset="-120"/>
               </a:rPr>
-              <a:t>回</a:t>
-            </a:r>
-            <a:r>
-              <a:rPr lang="zh-TW" altLang="en-US" sz="5400" b="1" dirty="0">
+              <a:t>唯獨祢是我拯救  我總不至死</a:t>
+            </a:r>
+          </a:p>
+          <a:p>
+            <a:pPr algn="ctr">
+              <a:buNone/>
+            </a:pPr>
+            <a:r>
+              <a:rPr lang="zh-TW" altLang="en-US" sz="6400" b="1" dirty="0">
+                <a:solidFill>
+                  <a:srgbClr val="000066"/>
+                </a:solidFill>
                 <a:latin typeface="微軟正黑體" pitchFamily="34" charset="-120"/>
                 <a:ea typeface="微軟正黑體" pitchFamily="34" charset="-120"/>
               </a:rPr>
-              <a:t>看這生精</a:t>
-            </a:r>
-            <a:r>
-              <a:rPr lang="zh-TW" altLang="en-US" sz="5400" b="1" dirty="0" smtClean="0">
-                <a:latin typeface="微軟正黑體" pitchFamily="34" charset="-120"/>
-                <a:ea typeface="微軟正黑體" pitchFamily="34" charset="-120"/>
-              </a:rPr>
-              <a:t>彩  因</a:t>
-            </a:r>
-            <a:r>
-              <a:rPr lang="zh-TW" altLang="en-US" sz="5400" b="1" dirty="0">
-                <a:latin typeface="微軟正黑體" pitchFamily="34" charset="-120"/>
-                <a:ea typeface="微軟正黑體" pitchFamily="34" charset="-120"/>
-              </a:rPr>
-              <a:t>有</a:t>
-            </a:r>
-            <a:r>
-              <a:rPr lang="zh-TW" altLang="en-US" sz="5400" b="1" dirty="0" smtClean="0">
-                <a:latin typeface="微軟正黑體" pitchFamily="34" charset="-120"/>
-                <a:ea typeface="微軟正黑體" pitchFamily="34" charset="-120"/>
-              </a:rPr>
-              <a:t>你</a:t>
-            </a:r>
-            <a:endParaRPr lang="en-US" altLang="zh-TW" sz="5400" b="1" dirty="0">
-              <a:latin typeface="微軟正黑體" pitchFamily="34" charset="-120"/>
-              <a:ea typeface="微軟正黑體" pitchFamily="34" charset="-120"/>
+              <a:t>直到永遠  從心底讚美</a:t>
+            </a:r>
+          </a:p>
+        </p:txBody>
+      </p:sp>
+      <p:sp>
+        <p:nvSpPr>
+          <p:cNvPr id="3" name="TextBox 2">
+            <a:extLst>
+              <a:ext uri="{FF2B5EF4-FFF2-40B4-BE49-F238E27FC236}">
+                <a16:creationId xmlns:a16="http://schemas.microsoft.com/office/drawing/2014/main" id="{D4462CC7-2078-46E2-E127-364E2F0FD803}"/>
+              </a:ext>
+            </a:extLst>
+          </p:cNvPr>
+          <p:cNvSpPr txBox="1"/>
+          <p:nvPr/>
+        </p:nvSpPr>
+        <p:spPr>
+          <a:xfrm>
+            <a:off x="0" y="5157193"/>
+            <a:ext cx="12192000" cy="584775"/>
+          </a:xfrm>
+          <a:prstGeom prst="rect">
+            <a:avLst/>
+          </a:prstGeom>
+          <a:noFill/>
+        </p:spPr>
+        <p:txBody>
+          <a:bodyPr wrap="square" rtlCol="0">
+            <a:spAutoFit/>
+          </a:bodyPr>
+          <a:lstStyle/>
+          <a:p>
+            <a:pPr algn="ctr"/>
+            <a:r>
+              <a:rPr lang="en-US" sz="3200" b="1" dirty="0">
+                <a:solidFill>
+                  <a:srgbClr val="000066"/>
+                </a:solidFill>
+                <a:latin typeface="Microsoft JhengHei" panose="020B0604030504040204" pitchFamily="34" charset="-120"/>
+                <a:ea typeface="Microsoft JhengHei" panose="020B0604030504040204" pitchFamily="34" charset="-120"/>
+              </a:rPr>
+              <a:t>( </a:t>
+            </a:r>
+            <a:r>
+              <a:rPr lang="zh-CN" altLang="en-US" sz="3200" b="1" dirty="0">
+                <a:solidFill>
+                  <a:srgbClr val="000066"/>
+                </a:solidFill>
+                <a:latin typeface="Microsoft JhengHei" panose="020B0604030504040204" pitchFamily="34" charset="-120"/>
+                <a:ea typeface="Microsoft JhengHei" panose="020B0604030504040204" pitchFamily="34" charset="-120"/>
+              </a:rPr>
+              <a:t>副歌</a:t>
+            </a:r>
+            <a:r>
+              <a:rPr lang="en-US" sz="3200" b="1" dirty="0">
+                <a:solidFill>
+                  <a:srgbClr val="000066"/>
+                </a:solidFill>
+                <a:latin typeface="Microsoft JhengHei" panose="020B0604030504040204" pitchFamily="34" charset="-120"/>
+                <a:ea typeface="Microsoft JhengHei" panose="020B0604030504040204" pitchFamily="34" charset="-120"/>
+              </a:rPr>
+              <a:t> )</a:t>
+            </a:r>
+            <a:endParaRPr lang="vi-VN" sz="3200" b="1" dirty="0">
+              <a:solidFill>
+                <a:srgbClr val="000066"/>
+              </a:solidFill>
+              <a:ea typeface="Microsoft JhengHei" panose="020B0604030504040204" pitchFamily="34" charset="-120"/>
             </a:endParaRPr>
           </a:p>
-          <a:p>
-            <a:pPr algn="ctr">
-              <a:buNone/>
-            </a:pPr>
-            <a:r>
-              <a:rPr lang="zh-TW" altLang="en-US" sz="5400" b="1" dirty="0" smtClean="0">
-                <a:latin typeface="微軟正黑體" pitchFamily="34" charset="-120"/>
-                <a:ea typeface="微軟正黑體" pitchFamily="34" charset="-120"/>
-              </a:rPr>
-              <a:t>人</a:t>
-            </a:r>
-            <a:r>
-              <a:rPr lang="zh-TW" altLang="en-US" sz="5400" b="1" dirty="0">
-                <a:latin typeface="微軟正黑體" pitchFamily="34" charset="-120"/>
-                <a:ea typeface="微軟正黑體" pitchFamily="34" charset="-120"/>
-              </a:rPr>
-              <a:t>在世永恆何</a:t>
-            </a:r>
-            <a:r>
-              <a:rPr lang="zh-TW" altLang="en-US" sz="5400" b="1" dirty="0" smtClean="0">
-                <a:latin typeface="微軟正黑體" pitchFamily="34" charset="-120"/>
-                <a:ea typeface="微軟正黑體" pitchFamily="34" charset="-120"/>
-              </a:rPr>
-              <a:t>在</a:t>
-            </a:r>
-            <a:endParaRPr lang="en-US" altLang="zh-TW" sz="5400" b="1" dirty="0" smtClean="0">
-              <a:latin typeface="微軟正黑體" pitchFamily="34" charset="-120"/>
-              <a:ea typeface="微軟正黑體" pitchFamily="34" charset="-120"/>
-            </a:endParaRPr>
-          </a:p>
-          <a:p>
-            <a:pPr algn="ctr">
-              <a:buNone/>
-            </a:pPr>
-            <a:r>
-              <a:rPr lang="zh-TW" altLang="en-US" sz="5400" b="1" dirty="0" smtClean="0">
-                <a:latin typeface="微軟正黑體" pitchFamily="34" charset="-120"/>
-                <a:ea typeface="微軟正黑體" pitchFamily="34" charset="-120"/>
-              </a:rPr>
-              <a:t>或</a:t>
-            </a:r>
-            <a:r>
-              <a:rPr lang="zh-TW" altLang="en-US" sz="5400" b="1" dirty="0">
-                <a:latin typeface="微軟正黑體" pitchFamily="34" charset="-120"/>
-                <a:ea typeface="微軟正黑體" pitchFamily="34" charset="-120"/>
-              </a:rPr>
-              <a:t>如流星閃耀掠</a:t>
-            </a:r>
-            <a:r>
-              <a:rPr lang="zh-TW" altLang="en-US" sz="5400" b="1" dirty="0" smtClean="0">
-                <a:latin typeface="微軟正黑體" pitchFamily="34" charset="-120"/>
-                <a:ea typeface="微軟正黑體" pitchFamily="34" charset="-120"/>
-              </a:rPr>
-              <a:t>過</a:t>
-            </a:r>
-            <a:endParaRPr lang="en-US" altLang="zh-TW" sz="5400" b="1" dirty="0" smtClean="0">
-              <a:latin typeface="微軟正黑體" pitchFamily="34" charset="-120"/>
-              <a:ea typeface="微軟正黑體" pitchFamily="34" charset="-120"/>
-            </a:endParaRPr>
-          </a:p>
-          <a:p>
-            <a:pPr algn="ctr">
-              <a:buNone/>
-            </a:pPr>
-            <a:r>
-              <a:rPr lang="zh-TW" altLang="en-US" sz="5400" b="1" dirty="0" smtClean="0">
-                <a:latin typeface="微軟正黑體" pitchFamily="34" charset="-120"/>
-                <a:ea typeface="微軟正黑體" pitchFamily="34" charset="-120"/>
-              </a:rPr>
-              <a:t>是</a:t>
-            </a:r>
-            <a:r>
-              <a:rPr lang="zh-TW" altLang="en-US" sz="5400" b="1" dirty="0">
-                <a:latin typeface="微軟正黑體" pitchFamily="34" charset="-120"/>
-                <a:ea typeface="微軟正黑體" pitchFamily="34" charset="-120"/>
-              </a:rPr>
-              <a:t>你令我人生找到靠</a:t>
-            </a:r>
-            <a:r>
-              <a:rPr lang="zh-TW" altLang="en-US" sz="5400" b="1" dirty="0" smtClean="0">
-                <a:latin typeface="微軟正黑體" pitchFamily="34" charset="-120"/>
-                <a:ea typeface="微軟正黑體" pitchFamily="34" charset="-120"/>
-              </a:rPr>
-              <a:t>依</a:t>
-            </a:r>
-            <a:endParaRPr lang="en-US" sz="5400" b="1" dirty="0">
-              <a:latin typeface="微軟正黑體" pitchFamily="34" charset="-120"/>
-              <a:ea typeface="微軟正黑體" pitchFamily="34" charset="-120"/>
-            </a:endParaRPr>
-          </a:p>
         </p:txBody>
       </p:sp>
     </p:spTree>
+    <p:extLst>
+      <p:ext uri="{BB962C8B-B14F-4D97-AF65-F5344CB8AC3E}">
+        <p14:creationId xmlns:p14="http://schemas.microsoft.com/office/powerpoint/2010/main" val="2163647610"/>
+      </p:ext>
+    </p:extLst>
   </p:cSld>
   <p:clrMapOvr>
     <a:masterClrMapping/>
@@ -3307,7 +3619,13 @@
   <p:cSld>
     <p:spTree>
       <p:nvGrpSpPr>
-        <p:cNvPr id="1" name=""/>
+        <p:cNvPr id="1" name="">
+          <a:extLst>
+            <a:ext uri="{FF2B5EF4-FFF2-40B4-BE49-F238E27FC236}">
+              <a16:creationId xmlns:a16="http://schemas.microsoft.com/office/drawing/2014/main" id="{499F6A04-361B-D03C-72FC-83746A3861FC}"/>
+            </a:ext>
+          </a:extLst>
+        </p:cNvPr>
         <p:cNvGrpSpPr/>
         <p:nvPr/>
       </p:nvGrpSpPr>
@@ -3321,256 +3639,137 @@
       </p:grpSpPr>
       <p:sp>
         <p:nvSpPr>
-          <p:cNvPr id="4" name="Title 3"/>
-          <p:cNvSpPr>
-            <a:spLocks noGrp="1"/>
-          </p:cNvSpPr>
-          <p:nvPr>
-            <p:ph type="title"/>
-          </p:nvPr>
-        </p:nvSpPr>
-        <p:spPr/>
-        <p:txBody>
-          <a:bodyPr/>
-          <a:lstStyle/>
-          <a:p>
-            <a:r>
-              <a:rPr lang="zh-CN" altLang="en-US" b="1" dirty="0">
+          <p:cNvPr id="5" name="內容版面配置區 4">
+            <a:extLst>
+              <a:ext uri="{FF2B5EF4-FFF2-40B4-BE49-F238E27FC236}">
+                <a16:creationId xmlns:a16="http://schemas.microsoft.com/office/drawing/2014/main" id="{EE77592B-EE8B-614D-4160-CDFC7BCE80DB}"/>
+              </a:ext>
+            </a:extLst>
+          </p:cNvPr>
+          <p:cNvSpPr>
+            <a:spLocks noGrp="1"/>
+          </p:cNvSpPr>
+          <p:nvPr>
+            <p:ph idx="1"/>
+          </p:nvPr>
+        </p:nvSpPr>
+        <p:spPr>
+          <a:xfrm>
+            <a:off x="0" y="2084851"/>
+            <a:ext cx="12192000" cy="2404863"/>
+          </a:xfrm>
+        </p:spPr>
+        <p:txBody>
+          <a:bodyPr anchor="ctr">
+            <a:normAutofit/>
+          </a:bodyPr>
+          <a:lstStyle/>
+          <a:p>
+            <a:pPr algn="ctr">
+              <a:buNone/>
+            </a:pPr>
+            <a:r>
+              <a:rPr lang="zh-TW" altLang="en-US" sz="6400" b="1" dirty="0">
+                <a:solidFill>
+                  <a:srgbClr val="000066"/>
+                </a:solidFill>
                 <a:latin typeface="微軟正黑體" pitchFamily="34" charset="-120"/>
                 <a:ea typeface="微軟正黑體" pitchFamily="34" charset="-120"/>
               </a:rPr>
-              <a:t>全因為你</a:t>
-            </a:r>
-            <a:endParaRPr lang="en-US" b="1" dirty="0">
-              <a:latin typeface="微軟正黑體" pitchFamily="34" charset="-120"/>
-              <a:ea typeface="微軟正黑體" pitchFamily="34" charset="-120"/>
-            </a:endParaRPr>
-          </a:p>
-        </p:txBody>
-      </p:sp>
-      <p:sp>
-        <p:nvSpPr>
-          <p:cNvPr id="5" name="Content Placeholder 4"/>
-          <p:cNvSpPr>
-            <a:spLocks noGrp="1"/>
-          </p:cNvSpPr>
-          <p:nvPr>
-            <p:ph idx="1"/>
-          </p:nvPr>
+              <a:t>常言道  人生像演戲</a:t>
+            </a:r>
+          </a:p>
+          <a:p>
+            <a:pPr algn="ctr">
+              <a:buNone/>
+            </a:pPr>
+            <a:r>
+              <a:rPr lang="zh-TW" altLang="en-US" sz="6400" b="1" dirty="0">
+                <a:solidFill>
+                  <a:srgbClr val="000066"/>
+                </a:solidFill>
+                <a:latin typeface="微軟正黑體" pitchFamily="34" charset="-120"/>
+                <a:ea typeface="微軟正黑體" pitchFamily="34" charset="-120"/>
+              </a:rPr>
+              <a:t>回看這生精彩  因有祢</a:t>
+            </a:r>
+          </a:p>
+        </p:txBody>
+      </p:sp>
+      <p:sp>
+        <p:nvSpPr>
+          <p:cNvPr id="3" name="TextBox 2">
+            <a:extLst>
+              <a:ext uri="{FF2B5EF4-FFF2-40B4-BE49-F238E27FC236}">
+                <a16:creationId xmlns:a16="http://schemas.microsoft.com/office/drawing/2014/main" id="{FA175DD0-F211-14DE-420F-4A50F79B6BD2}"/>
+              </a:ext>
+            </a:extLst>
+          </p:cNvPr>
+          <p:cNvSpPr txBox="1"/>
+          <p:nvPr/>
         </p:nvSpPr>
         <p:spPr>
           <a:xfrm>
-            <a:off x="457200" y="1600200"/>
-            <a:ext cx="8229600" cy="5029200"/>
+            <a:off x="0" y="5157193"/>
+            <a:ext cx="12192000" cy="584775"/>
           </a:xfrm>
+          <a:prstGeom prst="rect">
+            <a:avLst/>
+          </a:prstGeom>
+          <a:noFill/>
         </p:spPr>
         <p:txBody>
-          <a:bodyPr>
-            <a:noAutofit/>
+          <a:bodyPr wrap="square" rtlCol="0">
+            <a:spAutoFit/>
           </a:bodyPr>
           <a:lstStyle/>
           <a:p>
-            <a:pPr algn="ctr">
-              <a:buNone/>
-            </a:pPr>
-            <a:r>
-              <a:rPr lang="zh-TW" altLang="en-US" sz="5400" b="1" dirty="0">
-                <a:latin typeface="微軟正黑體" pitchFamily="34" charset="-120"/>
-                <a:ea typeface="微軟正黑體" pitchFamily="34" charset="-120"/>
-              </a:rPr>
-              <a:t>死蔭幽谷</a:t>
-            </a:r>
-            <a:r>
-              <a:rPr lang="zh-TW" altLang="en-US" sz="5400" b="1" dirty="0" smtClean="0">
-                <a:latin typeface="微軟正黑體" pitchFamily="34" charset="-120"/>
-                <a:ea typeface="微軟正黑體" pitchFamily="34" charset="-120"/>
-              </a:rPr>
-              <a:t>中  你</a:t>
-            </a:r>
-            <a:r>
-              <a:rPr lang="zh-TW" altLang="en-US" sz="5400" b="1" dirty="0">
-                <a:latin typeface="微軟正黑體" pitchFamily="34" charset="-120"/>
-                <a:ea typeface="微軟正黑體" pitchFamily="34" charset="-120"/>
-              </a:rPr>
-              <a:t>伴我過</a:t>
-            </a:r>
-            <a:r>
-              <a:rPr lang="zh-TW" altLang="en-US" sz="5400" b="1" dirty="0" smtClean="0">
-                <a:latin typeface="微軟正黑體" pitchFamily="34" charset="-120"/>
-                <a:ea typeface="微軟正黑體" pitchFamily="34" charset="-120"/>
-              </a:rPr>
-              <a:t>渡</a:t>
-            </a:r>
-            <a:endParaRPr lang="en-US" altLang="zh-TW" sz="5400" b="1" dirty="0" smtClean="0">
-              <a:latin typeface="微軟正黑體" pitchFamily="34" charset="-120"/>
-              <a:ea typeface="微軟正黑體" pitchFamily="34" charset="-120"/>
+            <a:pPr algn="ctr"/>
+            <a:r>
+              <a:rPr lang="en-US" sz="3200" b="1" dirty="0">
+                <a:solidFill>
+                  <a:srgbClr val="000066"/>
+                </a:solidFill>
+                <a:latin typeface="Microsoft JhengHei" panose="020B0604030504040204" pitchFamily="34" charset="-120"/>
+                <a:ea typeface="Microsoft JhengHei" panose="020B0604030504040204" pitchFamily="34" charset="-120"/>
+              </a:rPr>
+              <a:t>( </a:t>
+            </a:r>
+            <a:r>
+              <a:rPr lang="zh-CN" altLang="en-US" sz="3200" b="1" dirty="0">
+                <a:solidFill>
+                  <a:srgbClr val="000066"/>
+                </a:solidFill>
+                <a:latin typeface="Microsoft JhengHei" panose="020B0604030504040204" pitchFamily="34" charset="-120"/>
+                <a:ea typeface="Microsoft JhengHei" panose="020B0604030504040204" pitchFamily="34" charset="-120"/>
+              </a:rPr>
+              <a:t>正歌</a:t>
+            </a:r>
+            <a:r>
+              <a:rPr lang="en-US" sz="3200" b="1" dirty="0">
+                <a:solidFill>
+                  <a:srgbClr val="000066"/>
+                </a:solidFill>
+                <a:latin typeface="Microsoft JhengHei" panose="020B0604030504040204" pitchFamily="34" charset="-120"/>
+                <a:ea typeface="Microsoft JhengHei" panose="020B0604030504040204" pitchFamily="34" charset="-120"/>
+              </a:rPr>
+              <a:t> )</a:t>
+            </a:r>
+            <a:endParaRPr lang="vi-VN" sz="3200" b="1" dirty="0">
+              <a:solidFill>
+                <a:srgbClr val="000066"/>
+              </a:solidFill>
+              <a:ea typeface="Microsoft JhengHei" panose="020B0604030504040204" pitchFamily="34" charset="-120"/>
             </a:endParaRPr>
           </a:p>
-          <a:p>
-            <a:pPr algn="ctr">
-              <a:buNone/>
-            </a:pPr>
-            <a:r>
-              <a:rPr lang="zh-TW" altLang="en-US" sz="5400" b="1" dirty="0" smtClean="0">
-                <a:latin typeface="微軟正黑體" pitchFamily="34" charset="-120"/>
-                <a:ea typeface="微軟正黑體" pitchFamily="34" charset="-120"/>
-              </a:rPr>
-              <a:t>歡</a:t>
-            </a:r>
-            <a:r>
-              <a:rPr lang="zh-TW" altLang="en-US" sz="5400" b="1" dirty="0">
-                <a:latin typeface="微軟正黑體" pitchFamily="34" charset="-120"/>
-                <a:ea typeface="微軟正黑體" pitchFamily="34" charset="-120"/>
-              </a:rPr>
-              <a:t>欣</a:t>
-            </a:r>
-            <a:r>
-              <a:rPr lang="zh-TW" altLang="en-US" sz="5400" b="1" dirty="0" smtClean="0">
-                <a:latin typeface="微軟正黑體" pitchFamily="34" charset="-120"/>
-                <a:ea typeface="微軟正黑體" pitchFamily="34" charset="-120"/>
-              </a:rPr>
-              <a:t>裡  風</a:t>
-            </a:r>
-            <a:r>
-              <a:rPr lang="zh-TW" altLang="en-US" sz="5400" b="1" dirty="0">
-                <a:latin typeface="微軟正黑體" pitchFamily="34" charset="-120"/>
-                <a:ea typeface="微軟正黑體" pitchFamily="34" charset="-120"/>
-              </a:rPr>
-              <a:t>光裡你共我同</a:t>
-            </a:r>
-            <a:r>
-              <a:rPr lang="zh-TW" altLang="en-US" sz="5400" b="1" dirty="0" smtClean="0">
-                <a:latin typeface="微軟正黑體" pitchFamily="34" charset="-120"/>
-                <a:ea typeface="微軟正黑體" pitchFamily="34" charset="-120"/>
-              </a:rPr>
-              <a:t>在</a:t>
-            </a:r>
-            <a:endParaRPr lang="en-US" altLang="zh-TW" sz="5400" b="1" dirty="0" smtClean="0">
-              <a:latin typeface="微軟正黑體" pitchFamily="34" charset="-120"/>
-              <a:ea typeface="微軟正黑體" pitchFamily="34" charset="-120"/>
-            </a:endParaRPr>
-          </a:p>
-          <a:p>
-            <a:pPr algn="ctr">
-              <a:buNone/>
-            </a:pPr>
-            <a:r>
-              <a:rPr lang="zh-TW" altLang="en-US" sz="5400" b="1" dirty="0" smtClean="0">
-                <a:latin typeface="微軟正黑體" pitchFamily="34" charset="-120"/>
-                <a:ea typeface="微軟正黑體" pitchFamily="34" charset="-120"/>
-              </a:rPr>
-              <a:t>當</a:t>
-            </a:r>
-            <a:r>
-              <a:rPr lang="zh-TW" altLang="en-US" sz="5400" b="1" dirty="0">
-                <a:latin typeface="微軟正黑體" pitchFamily="34" charset="-120"/>
-                <a:ea typeface="微軟正黑體" pitchFamily="34" charset="-120"/>
-              </a:rPr>
-              <a:t>身處孤單傷</a:t>
-            </a:r>
-            <a:r>
-              <a:rPr lang="zh-TW" altLang="en-US" sz="5400" b="1" dirty="0" smtClean="0">
-                <a:latin typeface="微軟正黑體" pitchFamily="34" charset="-120"/>
-                <a:ea typeface="微軟正黑體" pitchFamily="34" charset="-120"/>
-              </a:rPr>
-              <a:t>痛</a:t>
-            </a:r>
-            <a:endParaRPr lang="en-US" altLang="zh-TW" sz="5400" b="1" dirty="0" smtClean="0">
-              <a:latin typeface="微軟正黑體" pitchFamily="34" charset="-120"/>
-              <a:ea typeface="微軟正黑體" pitchFamily="34" charset="-120"/>
-            </a:endParaRPr>
-          </a:p>
-          <a:p>
-            <a:pPr algn="ctr">
-              <a:buNone/>
-            </a:pPr>
-            <a:r>
-              <a:rPr lang="zh-TW" altLang="en-US" sz="5400" b="1" dirty="0" smtClean="0">
-                <a:latin typeface="微軟正黑體" pitchFamily="34" charset="-120"/>
-                <a:ea typeface="微軟正黑體" pitchFamily="34" charset="-120"/>
-              </a:rPr>
-              <a:t>來</a:t>
-            </a:r>
-            <a:r>
-              <a:rPr lang="zh-TW" altLang="en-US" sz="5400" b="1" dirty="0">
-                <a:latin typeface="微軟正黑體" pitchFamily="34" charset="-120"/>
-                <a:ea typeface="微軟正黑體" pitchFamily="34" charset="-120"/>
-              </a:rPr>
-              <a:t>擁我入</a:t>
-            </a:r>
-            <a:r>
-              <a:rPr lang="zh-TW" altLang="en-US" sz="5400" b="1" dirty="0" smtClean="0">
-                <a:latin typeface="微軟正黑體" pitchFamily="34" charset="-120"/>
-                <a:ea typeface="微軟正黑體" pitchFamily="34" charset="-120"/>
-              </a:rPr>
-              <a:t>懷</a:t>
-            </a:r>
-            <a:r>
-              <a:rPr lang="en-US" altLang="zh-TW" sz="5400" b="1" dirty="0">
-                <a:latin typeface="微軟正黑體" pitchFamily="34" charset="-120"/>
-                <a:ea typeface="微軟正黑體" pitchFamily="34" charset="-120"/>
-              </a:rPr>
-              <a:t> </a:t>
-            </a:r>
-            <a:r>
-              <a:rPr lang="en-US" altLang="zh-TW" sz="5400" b="1" dirty="0" smtClean="0">
-                <a:latin typeface="微軟正黑體" pitchFamily="34" charset="-120"/>
-                <a:ea typeface="微軟正黑體" pitchFamily="34" charset="-120"/>
-              </a:rPr>
-              <a:t> </a:t>
-            </a:r>
-            <a:r>
-              <a:rPr lang="zh-TW" altLang="en-US" sz="5400" b="1" dirty="0" smtClean="0">
-                <a:latin typeface="微軟正黑體" pitchFamily="34" charset="-120"/>
-                <a:ea typeface="微軟正黑體" pitchFamily="34" charset="-120"/>
-              </a:rPr>
-              <a:t>你</a:t>
-            </a:r>
-            <a:r>
-              <a:rPr lang="zh-TW" altLang="en-US" sz="5400" b="1" dirty="0">
-                <a:latin typeface="微軟正黑體" pitchFamily="34" charset="-120"/>
-                <a:ea typeface="微軟正黑體" pitchFamily="34" charset="-120"/>
-              </a:rPr>
-              <a:t>是我</a:t>
-            </a:r>
-            <a:r>
-              <a:rPr lang="zh-TW" altLang="en-US" sz="5400" b="1" dirty="0" smtClean="0">
-                <a:latin typeface="微軟正黑體" pitchFamily="34" charset="-120"/>
-                <a:ea typeface="微軟正黑體" pitchFamily="34" charset="-120"/>
-              </a:rPr>
-              <a:t>神</a:t>
-            </a:r>
-            <a:endParaRPr lang="en-US" altLang="zh-TW" sz="5400" b="1" dirty="0" smtClean="0">
-              <a:latin typeface="微軟正黑體" pitchFamily="34" charset="-120"/>
-              <a:ea typeface="微軟正黑體" pitchFamily="34" charset="-120"/>
-            </a:endParaRPr>
-          </a:p>
-          <a:p>
-            <a:pPr algn="ctr">
-              <a:buNone/>
-            </a:pPr>
-            <a:r>
-              <a:rPr lang="zh-TW" altLang="en-US" sz="5400" b="1" dirty="0" smtClean="0">
-                <a:latin typeface="微軟正黑體" pitchFamily="34" charset="-120"/>
-                <a:ea typeface="微軟正黑體" pitchFamily="34" charset="-120"/>
-              </a:rPr>
-              <a:t>是</a:t>
-            </a:r>
-            <a:r>
-              <a:rPr lang="zh-TW" altLang="en-US" sz="5400" b="1" dirty="0">
-                <a:latin typeface="微軟正黑體" pitchFamily="34" charset="-120"/>
-                <a:ea typeface="微軟正黑體" pitchFamily="34" charset="-120"/>
-              </a:rPr>
-              <a:t>我奇妙救恩</a:t>
-            </a:r>
-            <a:endParaRPr lang="en-US" sz="5400" b="1" dirty="0">
-              <a:latin typeface="微軟正黑體" pitchFamily="34" charset="-120"/>
-              <a:ea typeface="微軟正黑體" pitchFamily="34" charset="-120"/>
-            </a:endParaRPr>
-          </a:p>
         </p:txBody>
       </p:sp>
     </p:spTree>
+    <p:extLst>
+      <p:ext uri="{BB962C8B-B14F-4D97-AF65-F5344CB8AC3E}">
+        <p14:creationId xmlns:p14="http://schemas.microsoft.com/office/powerpoint/2010/main" val="3885075056"/>
+      </p:ext>
+    </p:extLst>
   </p:cSld>
   <p:clrMapOvr>
     <a:masterClrMapping/>
@@ -3583,7 +3782,13 @@
   <p:cSld>
     <p:spTree>
       <p:nvGrpSpPr>
-        <p:cNvPr id="1" name=""/>
+        <p:cNvPr id="1" name="">
+          <a:extLst>
+            <a:ext uri="{FF2B5EF4-FFF2-40B4-BE49-F238E27FC236}">
+              <a16:creationId xmlns:a16="http://schemas.microsoft.com/office/drawing/2014/main" id="{A0C902EF-BFB7-E5B8-E618-E611ADBA4B31}"/>
+            </a:ext>
+          </a:extLst>
+        </p:cNvPr>
         <p:cNvGrpSpPr/>
         <p:nvPr/>
       </p:nvGrpSpPr>
@@ -3597,242 +3802,137 @@
       </p:grpSpPr>
       <p:sp>
         <p:nvSpPr>
-          <p:cNvPr id="4" name="Title 3"/>
-          <p:cNvSpPr>
-            <a:spLocks noGrp="1"/>
-          </p:cNvSpPr>
-          <p:nvPr>
-            <p:ph type="title"/>
-          </p:nvPr>
-        </p:nvSpPr>
-        <p:spPr/>
-        <p:txBody>
-          <a:bodyPr/>
-          <a:lstStyle/>
-          <a:p>
-            <a:r>
-              <a:rPr lang="zh-CN" altLang="en-US" b="1" dirty="0">
+          <p:cNvPr id="5" name="內容版面配置區 4">
+            <a:extLst>
+              <a:ext uri="{FF2B5EF4-FFF2-40B4-BE49-F238E27FC236}">
+                <a16:creationId xmlns:a16="http://schemas.microsoft.com/office/drawing/2014/main" id="{9DCDA65C-F454-362E-3D00-F748F5C7DE9B}"/>
+              </a:ext>
+            </a:extLst>
+          </p:cNvPr>
+          <p:cNvSpPr>
+            <a:spLocks noGrp="1"/>
+          </p:cNvSpPr>
+          <p:nvPr>
+            <p:ph idx="1"/>
+          </p:nvPr>
+        </p:nvSpPr>
+        <p:spPr>
+          <a:xfrm>
+            <a:off x="0" y="2084851"/>
+            <a:ext cx="12192000" cy="2404863"/>
+          </a:xfrm>
+        </p:spPr>
+        <p:txBody>
+          <a:bodyPr anchor="ctr">
+            <a:normAutofit/>
+          </a:bodyPr>
+          <a:lstStyle/>
+          <a:p>
+            <a:pPr algn="ctr">
+              <a:buNone/>
+            </a:pPr>
+            <a:r>
+              <a:rPr lang="zh-TW" altLang="en-US" sz="6400" b="1" dirty="0">
+                <a:solidFill>
+                  <a:srgbClr val="000066"/>
+                </a:solidFill>
                 <a:latin typeface="微軟正黑體" pitchFamily="34" charset="-120"/>
                 <a:ea typeface="微軟正黑體" pitchFamily="34" charset="-120"/>
               </a:rPr>
-              <a:t>全因為你</a:t>
-            </a:r>
-            <a:endParaRPr lang="en-US" b="1" dirty="0">
-              <a:latin typeface="微軟正黑體" pitchFamily="34" charset="-120"/>
-              <a:ea typeface="微軟正黑體" pitchFamily="34" charset="-120"/>
-            </a:endParaRPr>
-          </a:p>
-        </p:txBody>
-      </p:sp>
-      <p:sp>
-        <p:nvSpPr>
-          <p:cNvPr id="5" name="Content Placeholder 4"/>
-          <p:cNvSpPr>
-            <a:spLocks noGrp="1"/>
-          </p:cNvSpPr>
-          <p:nvPr>
-            <p:ph idx="1"/>
-          </p:nvPr>
+              <a:t>人在世永恆何在</a:t>
+            </a:r>
+          </a:p>
+          <a:p>
+            <a:pPr algn="ctr">
+              <a:buNone/>
+            </a:pPr>
+            <a:r>
+              <a:rPr lang="zh-TW" altLang="en-US" sz="6400" b="1" dirty="0">
+                <a:solidFill>
+                  <a:srgbClr val="000066"/>
+                </a:solidFill>
+                <a:latin typeface="微軟正黑體" pitchFamily="34" charset="-120"/>
+                <a:ea typeface="微軟正黑體" pitchFamily="34" charset="-120"/>
+              </a:rPr>
+              <a:t>或如流星閃耀掠過</a:t>
+            </a:r>
+          </a:p>
+        </p:txBody>
+      </p:sp>
+      <p:sp>
+        <p:nvSpPr>
+          <p:cNvPr id="3" name="TextBox 2">
+            <a:extLst>
+              <a:ext uri="{FF2B5EF4-FFF2-40B4-BE49-F238E27FC236}">
+                <a16:creationId xmlns:a16="http://schemas.microsoft.com/office/drawing/2014/main" id="{1F98D823-38C5-E14A-954A-CEA52B949EC9}"/>
+              </a:ext>
+            </a:extLst>
+          </p:cNvPr>
+          <p:cNvSpPr txBox="1"/>
+          <p:nvPr/>
         </p:nvSpPr>
         <p:spPr>
           <a:xfrm>
-            <a:off x="152400" y="1600200"/>
-            <a:ext cx="8839200" cy="5029200"/>
+            <a:off x="0" y="5157193"/>
+            <a:ext cx="12192000" cy="584775"/>
           </a:xfrm>
+          <a:prstGeom prst="rect">
+            <a:avLst/>
+          </a:prstGeom>
+          <a:noFill/>
         </p:spPr>
         <p:txBody>
-          <a:bodyPr>
-            <a:noAutofit/>
+          <a:bodyPr wrap="square" rtlCol="0">
+            <a:spAutoFit/>
           </a:bodyPr>
           <a:lstStyle/>
           <a:p>
-            <a:pPr algn="ctr">
-              <a:buNone/>
-            </a:pPr>
-            <a:r>
-              <a:rPr lang="zh-TW" altLang="en-US" sz="5400" b="1" dirty="0">
-                <a:latin typeface="微軟正黑體" pitchFamily="34" charset="-120"/>
-                <a:ea typeface="微軟正黑體" pitchFamily="34" charset="-120"/>
-              </a:rPr>
-              <a:t>全因為</a:t>
-            </a:r>
-            <a:r>
-              <a:rPr lang="zh-TW" altLang="en-US" sz="5400" b="1" dirty="0" smtClean="0">
-                <a:latin typeface="微軟正黑體" pitchFamily="34" charset="-120"/>
-                <a:ea typeface="微軟正黑體" pitchFamily="34" charset="-120"/>
-              </a:rPr>
-              <a:t>你  令</a:t>
-            </a:r>
-            <a:r>
-              <a:rPr lang="zh-TW" altLang="en-US" sz="5400" b="1" dirty="0">
-                <a:latin typeface="微軟正黑體" pitchFamily="34" charset="-120"/>
-                <a:ea typeface="微軟正黑體" pitchFamily="34" charset="-120"/>
-              </a:rPr>
-              <a:t>我一生都佳</a:t>
-            </a:r>
-            <a:r>
-              <a:rPr lang="zh-TW" altLang="en-US" sz="5400" b="1" dirty="0" smtClean="0">
-                <a:latin typeface="微軟正黑體" pitchFamily="34" charset="-120"/>
-                <a:ea typeface="微軟正黑體" pitchFamily="34" charset="-120"/>
-              </a:rPr>
-              <a:t>美</a:t>
-            </a:r>
-            <a:endParaRPr lang="en-US" altLang="zh-TW" sz="5400" b="1" dirty="0" smtClean="0">
-              <a:latin typeface="微軟正黑體" pitchFamily="34" charset="-120"/>
-              <a:ea typeface="微軟正黑體" pitchFamily="34" charset="-120"/>
+            <a:pPr algn="ctr"/>
+            <a:r>
+              <a:rPr lang="en-US" sz="3200" b="1" dirty="0">
+                <a:solidFill>
+                  <a:srgbClr val="000066"/>
+                </a:solidFill>
+                <a:latin typeface="Microsoft JhengHei" panose="020B0604030504040204" pitchFamily="34" charset="-120"/>
+                <a:ea typeface="Microsoft JhengHei" panose="020B0604030504040204" pitchFamily="34" charset="-120"/>
+              </a:rPr>
+              <a:t>( </a:t>
+            </a:r>
+            <a:r>
+              <a:rPr lang="zh-CN" altLang="en-US" sz="3200" b="1" dirty="0">
+                <a:solidFill>
+                  <a:srgbClr val="000066"/>
+                </a:solidFill>
+                <a:latin typeface="Microsoft JhengHei" panose="020B0604030504040204" pitchFamily="34" charset="-120"/>
+                <a:ea typeface="Microsoft JhengHei" panose="020B0604030504040204" pitchFamily="34" charset="-120"/>
+              </a:rPr>
+              <a:t>正歌</a:t>
+            </a:r>
+            <a:r>
+              <a:rPr lang="en-US" sz="3200" b="1" dirty="0">
+                <a:solidFill>
+                  <a:srgbClr val="000066"/>
+                </a:solidFill>
+                <a:latin typeface="Microsoft JhengHei" panose="020B0604030504040204" pitchFamily="34" charset="-120"/>
+                <a:ea typeface="Microsoft JhengHei" panose="020B0604030504040204" pitchFamily="34" charset="-120"/>
+              </a:rPr>
+              <a:t> )</a:t>
+            </a:r>
+            <a:endParaRPr lang="vi-VN" sz="3200" b="1" dirty="0">
+              <a:solidFill>
+                <a:srgbClr val="000066"/>
+              </a:solidFill>
+              <a:ea typeface="Microsoft JhengHei" panose="020B0604030504040204" pitchFamily="34" charset="-120"/>
             </a:endParaRPr>
           </a:p>
-          <a:p>
-            <a:pPr algn="ctr">
-              <a:buNone/>
-            </a:pPr>
-            <a:r>
-              <a:rPr lang="zh-TW" altLang="en-US" sz="5400" b="1" dirty="0" smtClean="0">
-                <a:latin typeface="微軟正黑體" pitchFamily="34" charset="-120"/>
-                <a:ea typeface="微軟正黑體" pitchFamily="34" charset="-120"/>
-              </a:rPr>
-              <a:t>你</a:t>
-            </a:r>
-            <a:r>
-              <a:rPr lang="zh-TW" altLang="en-US" sz="5400" b="1" dirty="0">
-                <a:latin typeface="微軟正黑體" pitchFamily="34" charset="-120"/>
-                <a:ea typeface="微軟正黑體" pitchFamily="34" charset="-120"/>
-              </a:rPr>
-              <a:t>令我生命從空</a:t>
-            </a:r>
-            <a:r>
-              <a:rPr lang="zh-TW" altLang="en-US" sz="5400" b="1" dirty="0" smtClean="0">
-                <a:latin typeface="微軟正黑體" pitchFamily="34" charset="-120"/>
-                <a:ea typeface="微軟正黑體" pitchFamily="34" charset="-120"/>
-              </a:rPr>
-              <a:t>虛</a:t>
-            </a:r>
-            <a:r>
-              <a:rPr lang="en-US" altLang="zh-TW" sz="5400" b="1" dirty="0">
-                <a:latin typeface="微軟正黑體" pitchFamily="34" charset="-120"/>
-                <a:ea typeface="微軟正黑體" pitchFamily="34" charset="-120"/>
-              </a:rPr>
-              <a:t> </a:t>
-            </a:r>
-            <a:r>
-              <a:rPr lang="en-US" altLang="zh-TW" sz="5400" b="1" dirty="0" smtClean="0">
-                <a:latin typeface="微軟正黑體" pitchFamily="34" charset="-120"/>
-                <a:ea typeface="微軟正黑體" pitchFamily="34" charset="-120"/>
-              </a:rPr>
-              <a:t> </a:t>
-            </a:r>
-            <a:r>
-              <a:rPr lang="zh-TW" altLang="en-US" sz="5400" b="1" dirty="0" smtClean="0">
-                <a:latin typeface="微軟正黑體" pitchFamily="34" charset="-120"/>
-                <a:ea typeface="微軟正黑體" pitchFamily="34" charset="-120"/>
-              </a:rPr>
-              <a:t>化</a:t>
-            </a:r>
-            <a:r>
-              <a:rPr lang="zh-TW" altLang="en-US" sz="5400" b="1" dirty="0">
-                <a:latin typeface="微軟正黑體" pitchFamily="34" charset="-120"/>
-                <a:ea typeface="微軟正黑體" pitchFamily="34" charset="-120"/>
-              </a:rPr>
-              <a:t>做傳</a:t>
-            </a:r>
-            <a:r>
-              <a:rPr lang="zh-TW" altLang="en-US" sz="5400" b="1" dirty="0" smtClean="0">
-                <a:latin typeface="微軟正黑體" pitchFamily="34" charset="-120"/>
-                <a:ea typeface="微軟正黑體" pitchFamily="34" charset="-120"/>
-              </a:rPr>
-              <a:t>奇 </a:t>
-            </a:r>
-            <a:endParaRPr lang="en-US" altLang="zh-TW" sz="5400" b="1" dirty="0" smtClean="0">
-              <a:latin typeface="微軟正黑體" pitchFamily="34" charset="-120"/>
-              <a:ea typeface="微軟正黑體" pitchFamily="34" charset="-120"/>
-            </a:endParaRPr>
-          </a:p>
-          <a:p>
-            <a:pPr algn="ctr">
-              <a:buNone/>
-            </a:pPr>
-            <a:r>
-              <a:rPr lang="zh-TW" altLang="en-US" sz="5400" b="1" dirty="0" smtClean="0">
-                <a:latin typeface="微軟正黑體" pitchFamily="34" charset="-120"/>
-                <a:ea typeface="微軟正黑體" pitchFamily="34" charset="-120"/>
-              </a:rPr>
-              <a:t>無</a:t>
-            </a:r>
-            <a:r>
-              <a:rPr lang="zh-TW" altLang="en-US" sz="5400" b="1" dirty="0">
-                <a:latin typeface="微軟正黑體" pitchFamily="34" charset="-120"/>
-                <a:ea typeface="微軟正黑體" pitchFamily="34" charset="-120"/>
-              </a:rPr>
-              <a:t>論我壯如紅</a:t>
-            </a:r>
-            <a:r>
-              <a:rPr lang="zh-TW" altLang="en-US" sz="5400" b="1" dirty="0" smtClean="0">
-                <a:latin typeface="微軟正黑體" pitchFamily="34" charset="-120"/>
-                <a:ea typeface="微軟正黑體" pitchFamily="34" charset="-120"/>
-              </a:rPr>
-              <a:t>日</a:t>
-            </a:r>
-            <a:endParaRPr lang="en-US" altLang="zh-TW" sz="5400" b="1" dirty="0" smtClean="0">
-              <a:latin typeface="微軟正黑體" pitchFamily="34" charset="-120"/>
-              <a:ea typeface="微軟正黑體" pitchFamily="34" charset="-120"/>
-            </a:endParaRPr>
-          </a:p>
-          <a:p>
-            <a:pPr algn="ctr">
-              <a:buNone/>
-            </a:pPr>
-            <a:r>
-              <a:rPr lang="zh-TW" altLang="en-US" sz="5400" b="1" dirty="0" smtClean="0">
-                <a:latin typeface="微軟正黑體" pitchFamily="34" charset="-120"/>
-                <a:ea typeface="微軟正黑體" pitchFamily="34" charset="-120"/>
-              </a:rPr>
-              <a:t>或</a:t>
-            </a:r>
-            <a:r>
-              <a:rPr lang="zh-TW" altLang="en-US" sz="5400" b="1" dirty="0">
-                <a:latin typeface="微軟正黑體" pitchFamily="34" charset="-120"/>
-                <a:ea typeface="微軟正黑體" pitchFamily="34" charset="-120"/>
-              </a:rPr>
-              <a:t>如黃昏般漸漸</a:t>
-            </a:r>
-            <a:r>
-              <a:rPr lang="zh-TW" altLang="en-US" sz="5400" b="1" dirty="0" smtClean="0">
-                <a:latin typeface="微軟正黑體" pitchFamily="34" charset="-120"/>
-                <a:ea typeface="微軟正黑體" pitchFamily="34" charset="-120"/>
-              </a:rPr>
-              <a:t>老</a:t>
-            </a:r>
-            <a:endParaRPr lang="en-US" altLang="zh-TW" sz="5400" b="1" dirty="0" smtClean="0">
-              <a:latin typeface="微軟正黑體" pitchFamily="34" charset="-120"/>
-              <a:ea typeface="微軟正黑體" pitchFamily="34" charset="-120"/>
-            </a:endParaRPr>
-          </a:p>
-          <a:p>
-            <a:pPr algn="ctr">
-              <a:buNone/>
-            </a:pPr>
-            <a:r>
-              <a:rPr lang="zh-TW" altLang="en-US" sz="5400" b="1" dirty="0" smtClean="0">
-                <a:latin typeface="微軟正黑體" pitchFamily="34" charset="-120"/>
-                <a:ea typeface="微軟正黑體" pitchFamily="34" charset="-120"/>
-              </a:rPr>
-              <a:t>是</a:t>
-            </a:r>
-            <a:r>
-              <a:rPr lang="zh-TW" altLang="en-US" sz="5400" b="1" dirty="0">
-                <a:latin typeface="微軟正黑體" pitchFamily="34" charset="-120"/>
-                <a:ea typeface="微軟正黑體" pitchFamily="34" charset="-120"/>
-              </a:rPr>
-              <a:t>你令我如鷹般高飛</a:t>
-            </a:r>
-            <a:endParaRPr lang="en-US" sz="5400" b="1" dirty="0">
-              <a:latin typeface="微軟正黑體" pitchFamily="34" charset="-120"/>
-              <a:ea typeface="微軟正黑體" pitchFamily="34" charset="-120"/>
-            </a:endParaRPr>
-          </a:p>
         </p:txBody>
       </p:sp>
     </p:spTree>
+    <p:extLst>
+      <p:ext uri="{BB962C8B-B14F-4D97-AF65-F5344CB8AC3E}">
+        <p14:creationId xmlns:p14="http://schemas.microsoft.com/office/powerpoint/2010/main" val="497244244"/>
+      </p:ext>
+    </p:extLst>
   </p:cSld>
   <p:clrMapOvr>
     <a:masterClrMapping/>
@@ -3845,7 +3945,13 @@
   <p:cSld>
     <p:spTree>
       <p:nvGrpSpPr>
-        <p:cNvPr id="1" name=""/>
+        <p:cNvPr id="1" name="">
+          <a:extLst>
+            <a:ext uri="{FF2B5EF4-FFF2-40B4-BE49-F238E27FC236}">
+              <a16:creationId xmlns:a16="http://schemas.microsoft.com/office/drawing/2014/main" id="{9439BC9E-4B46-5937-11DD-B86BE5C489A8}"/>
+            </a:ext>
+          </a:extLst>
+        </p:cNvPr>
         <p:cNvGrpSpPr/>
         <p:nvPr/>
       </p:nvGrpSpPr>
@@ -3859,52 +3965,510 @@
       </p:grpSpPr>
       <p:sp>
         <p:nvSpPr>
-          <p:cNvPr id="4" name="Title 3"/>
-          <p:cNvSpPr>
-            <a:spLocks noGrp="1"/>
-          </p:cNvSpPr>
-          <p:nvPr>
-            <p:ph type="title"/>
-          </p:nvPr>
-        </p:nvSpPr>
-        <p:spPr/>
-        <p:txBody>
-          <a:bodyPr/>
-          <a:lstStyle/>
-          <a:p>
-            <a:r>
-              <a:rPr lang="zh-CN" altLang="en-US" b="1" dirty="0">
+          <p:cNvPr id="5" name="內容版面配置區 4">
+            <a:extLst>
+              <a:ext uri="{FF2B5EF4-FFF2-40B4-BE49-F238E27FC236}">
+                <a16:creationId xmlns:a16="http://schemas.microsoft.com/office/drawing/2014/main" id="{23B13AA5-418B-6282-E5F6-87D17CC69059}"/>
+              </a:ext>
+            </a:extLst>
+          </p:cNvPr>
+          <p:cNvSpPr>
+            <a:spLocks noGrp="1"/>
+          </p:cNvSpPr>
+          <p:nvPr>
+            <p:ph idx="1"/>
+          </p:nvPr>
+        </p:nvSpPr>
+        <p:spPr>
+          <a:xfrm>
+            <a:off x="0" y="2084851"/>
+            <a:ext cx="12192000" cy="2404863"/>
+          </a:xfrm>
+        </p:spPr>
+        <p:txBody>
+          <a:bodyPr anchor="ctr">
+            <a:normAutofit/>
+          </a:bodyPr>
+          <a:lstStyle/>
+          <a:p>
+            <a:pPr algn="ctr">
+              <a:buNone/>
+            </a:pPr>
+            <a:r>
+              <a:rPr lang="zh-CN" altLang="en-US" sz="6400" b="1" dirty="0">
+                <a:solidFill>
+                  <a:srgbClr val="000066"/>
+                </a:solidFill>
                 <a:latin typeface="微軟正黑體" pitchFamily="34" charset="-120"/>
                 <a:ea typeface="微軟正黑體" pitchFamily="34" charset="-120"/>
               </a:rPr>
-              <a:t>全因為你</a:t>
-            </a:r>
-            <a:endParaRPr lang="en-US" b="1" dirty="0">
+              <a:t>是祢令我人生找到靠依</a:t>
+            </a:r>
+          </a:p>
+        </p:txBody>
+      </p:sp>
+      <p:sp>
+        <p:nvSpPr>
+          <p:cNvPr id="3" name="TextBox 2">
+            <a:extLst>
+              <a:ext uri="{FF2B5EF4-FFF2-40B4-BE49-F238E27FC236}">
+                <a16:creationId xmlns:a16="http://schemas.microsoft.com/office/drawing/2014/main" id="{64ED78B9-3AB7-6354-7A73-8D53C069EC70}"/>
+              </a:ext>
+            </a:extLst>
+          </p:cNvPr>
+          <p:cNvSpPr txBox="1"/>
+          <p:nvPr/>
+        </p:nvSpPr>
+        <p:spPr>
+          <a:xfrm>
+            <a:off x="0" y="5157193"/>
+            <a:ext cx="12192000" cy="584775"/>
+          </a:xfrm>
+          <a:prstGeom prst="rect">
+            <a:avLst/>
+          </a:prstGeom>
+          <a:noFill/>
+        </p:spPr>
+        <p:txBody>
+          <a:bodyPr wrap="square" rtlCol="0">
+            <a:spAutoFit/>
+          </a:bodyPr>
+          <a:lstStyle/>
+          <a:p>
+            <a:pPr algn="ctr"/>
+            <a:r>
+              <a:rPr lang="en-US" sz="3200" b="1" dirty="0">
+                <a:solidFill>
+                  <a:srgbClr val="000066"/>
+                </a:solidFill>
+                <a:latin typeface="Microsoft JhengHei" panose="020B0604030504040204" pitchFamily="34" charset="-120"/>
+                <a:ea typeface="Microsoft JhengHei" panose="020B0604030504040204" pitchFamily="34" charset="-120"/>
+              </a:rPr>
+              <a:t>( </a:t>
+            </a:r>
+            <a:r>
+              <a:rPr lang="zh-CN" altLang="en-US" sz="3200" b="1" dirty="0">
+                <a:solidFill>
+                  <a:srgbClr val="000066"/>
+                </a:solidFill>
+                <a:latin typeface="Microsoft JhengHei" panose="020B0604030504040204" pitchFamily="34" charset="-120"/>
+                <a:ea typeface="Microsoft JhengHei" panose="020B0604030504040204" pitchFamily="34" charset="-120"/>
+              </a:rPr>
+              <a:t>正歌</a:t>
+            </a:r>
+            <a:r>
+              <a:rPr lang="en-US" sz="3200" b="1" dirty="0">
+                <a:solidFill>
+                  <a:srgbClr val="000066"/>
+                </a:solidFill>
+                <a:latin typeface="Microsoft JhengHei" panose="020B0604030504040204" pitchFamily="34" charset="-120"/>
+                <a:ea typeface="Microsoft JhengHei" panose="020B0604030504040204" pitchFamily="34" charset="-120"/>
+              </a:rPr>
+              <a:t> )</a:t>
+            </a:r>
+            <a:endParaRPr lang="vi-VN" sz="3200" b="1" dirty="0">
+              <a:solidFill>
+                <a:srgbClr val="000066"/>
+              </a:solidFill>
+              <a:ea typeface="Microsoft JhengHei" panose="020B0604030504040204" pitchFamily="34" charset="-120"/>
+            </a:endParaRPr>
+          </a:p>
+        </p:txBody>
+      </p:sp>
+    </p:spTree>
+    <p:extLst>
+      <p:ext uri="{BB962C8B-B14F-4D97-AF65-F5344CB8AC3E}">
+        <p14:creationId xmlns:p14="http://schemas.microsoft.com/office/powerpoint/2010/main" val="1307505955"/>
+      </p:ext>
+    </p:extLst>
+  </p:cSld>
+  <p:clrMapOvr>
+    <a:masterClrMapping/>
+  </p:clrMapOvr>
+</p:sld>
+</file>
+
+<file path=ppt/slides/slide5.xml><?xml version="1.0" encoding="utf-8"?>
+<p:sld xmlns:a="http://schemas.openxmlformats.org/drawingml/2006/main" xmlns:r="http://schemas.openxmlformats.org/officeDocument/2006/relationships" xmlns:p="http://schemas.openxmlformats.org/presentationml/2006/main">
+  <p:cSld>
+    <p:spTree>
+      <p:nvGrpSpPr>
+        <p:cNvPr id="1" name="">
+          <a:extLst>
+            <a:ext uri="{FF2B5EF4-FFF2-40B4-BE49-F238E27FC236}">
+              <a16:creationId xmlns:a16="http://schemas.microsoft.com/office/drawing/2014/main" id="{FFF4C6F6-4C65-179A-4C2B-4BF1BD368A67}"/>
+            </a:ext>
+          </a:extLst>
+        </p:cNvPr>
+        <p:cNvGrpSpPr/>
+        <p:nvPr/>
+      </p:nvGrpSpPr>
+      <p:grpSpPr>
+        <a:xfrm>
+          <a:off x="0" y="0"/>
+          <a:ext cx="0" cy="0"/>
+          <a:chOff x="0" y="0"/>
+          <a:chExt cx="0" cy="0"/>
+        </a:xfrm>
+      </p:grpSpPr>
+      <p:sp>
+        <p:nvSpPr>
+          <p:cNvPr id="5" name="內容版面配置區 4">
+            <a:extLst>
+              <a:ext uri="{FF2B5EF4-FFF2-40B4-BE49-F238E27FC236}">
+                <a16:creationId xmlns:a16="http://schemas.microsoft.com/office/drawing/2014/main" id="{D222471B-6077-5211-225F-FE33C3B69E13}"/>
+              </a:ext>
+            </a:extLst>
+          </p:cNvPr>
+          <p:cNvSpPr>
+            <a:spLocks noGrp="1"/>
+          </p:cNvSpPr>
+          <p:nvPr>
+            <p:ph idx="1"/>
+          </p:nvPr>
+        </p:nvSpPr>
+        <p:spPr>
+          <a:xfrm>
+            <a:off x="0" y="2084851"/>
+            <a:ext cx="12192000" cy="2404863"/>
+          </a:xfrm>
+        </p:spPr>
+        <p:txBody>
+          <a:bodyPr anchor="ctr">
+            <a:normAutofit/>
+          </a:bodyPr>
+          <a:lstStyle/>
+          <a:p>
+            <a:pPr algn="ctr">
+              <a:buNone/>
+            </a:pPr>
+            <a:r>
+              <a:rPr lang="zh-TW" altLang="en-US" sz="6400" b="1" dirty="0">
+                <a:solidFill>
+                  <a:srgbClr val="000066"/>
+                </a:solidFill>
+                <a:latin typeface="微軟正黑體" pitchFamily="34" charset="-120"/>
+                <a:ea typeface="微軟正黑體" pitchFamily="34" charset="-120"/>
+              </a:rPr>
+              <a:t>死蔭幽谷中  祢伴我過渡</a:t>
+            </a:r>
+          </a:p>
+          <a:p>
+            <a:pPr algn="ctr">
+              <a:buNone/>
+            </a:pPr>
+            <a:r>
+              <a:rPr lang="zh-TW" altLang="en-US" sz="6400" b="1" dirty="0">
+                <a:solidFill>
+                  <a:srgbClr val="000066"/>
+                </a:solidFill>
+                <a:latin typeface="微軟正黑體" pitchFamily="34" charset="-120"/>
+                <a:ea typeface="微軟正黑體" pitchFamily="34" charset="-120"/>
+              </a:rPr>
+              <a:t>歡欣裡  風光裡祢共我同在</a:t>
+            </a:r>
+          </a:p>
+        </p:txBody>
+      </p:sp>
+      <p:sp>
+        <p:nvSpPr>
+          <p:cNvPr id="3" name="TextBox 2">
+            <a:extLst>
+              <a:ext uri="{FF2B5EF4-FFF2-40B4-BE49-F238E27FC236}">
+                <a16:creationId xmlns:a16="http://schemas.microsoft.com/office/drawing/2014/main" id="{2740D520-A633-53B4-B68E-9D86F726831A}"/>
+              </a:ext>
+            </a:extLst>
+          </p:cNvPr>
+          <p:cNvSpPr txBox="1"/>
+          <p:nvPr/>
+        </p:nvSpPr>
+        <p:spPr>
+          <a:xfrm>
+            <a:off x="0" y="5157193"/>
+            <a:ext cx="12192000" cy="584775"/>
+          </a:xfrm>
+          <a:prstGeom prst="rect">
+            <a:avLst/>
+          </a:prstGeom>
+          <a:noFill/>
+        </p:spPr>
+        <p:txBody>
+          <a:bodyPr wrap="square" rtlCol="0">
+            <a:spAutoFit/>
+          </a:bodyPr>
+          <a:lstStyle/>
+          <a:p>
+            <a:pPr algn="ctr"/>
+            <a:r>
+              <a:rPr lang="en-US" sz="3200" b="1" dirty="0">
+                <a:solidFill>
+                  <a:srgbClr val="000066"/>
+                </a:solidFill>
+                <a:latin typeface="Microsoft JhengHei" panose="020B0604030504040204" pitchFamily="34" charset="-120"/>
+                <a:ea typeface="Microsoft JhengHei" panose="020B0604030504040204" pitchFamily="34" charset="-120"/>
+              </a:rPr>
+              <a:t>( </a:t>
+            </a:r>
+            <a:r>
+              <a:rPr lang="zh-CN" altLang="en-US" sz="3200" b="1" dirty="0">
+                <a:solidFill>
+                  <a:srgbClr val="000066"/>
+                </a:solidFill>
+                <a:latin typeface="Microsoft JhengHei" panose="020B0604030504040204" pitchFamily="34" charset="-120"/>
+                <a:ea typeface="Microsoft JhengHei" panose="020B0604030504040204" pitchFamily="34" charset="-120"/>
+              </a:rPr>
+              <a:t>正歌</a:t>
+            </a:r>
+            <a:r>
+              <a:rPr lang="en-US" sz="3200" b="1" dirty="0">
+                <a:solidFill>
+                  <a:srgbClr val="000066"/>
+                </a:solidFill>
+                <a:latin typeface="Microsoft JhengHei" panose="020B0604030504040204" pitchFamily="34" charset="-120"/>
+                <a:ea typeface="Microsoft JhengHei" panose="020B0604030504040204" pitchFamily="34" charset="-120"/>
+              </a:rPr>
+              <a:t> )</a:t>
+            </a:r>
+            <a:endParaRPr lang="vi-VN" sz="3200" b="1" dirty="0">
+              <a:solidFill>
+                <a:srgbClr val="000066"/>
+              </a:solidFill>
+              <a:ea typeface="Microsoft JhengHei" panose="020B0604030504040204" pitchFamily="34" charset="-120"/>
+            </a:endParaRPr>
+          </a:p>
+        </p:txBody>
+      </p:sp>
+    </p:spTree>
+    <p:extLst>
+      <p:ext uri="{BB962C8B-B14F-4D97-AF65-F5344CB8AC3E}">
+        <p14:creationId xmlns:p14="http://schemas.microsoft.com/office/powerpoint/2010/main" val="1302665591"/>
+      </p:ext>
+    </p:extLst>
+  </p:cSld>
+  <p:clrMapOvr>
+    <a:masterClrMapping/>
+  </p:clrMapOvr>
+</p:sld>
+</file>
+
+<file path=ppt/slides/slide6.xml><?xml version="1.0" encoding="utf-8"?>
+<p:sld xmlns:a="http://schemas.openxmlformats.org/drawingml/2006/main" xmlns:r="http://schemas.openxmlformats.org/officeDocument/2006/relationships" xmlns:p="http://schemas.openxmlformats.org/presentationml/2006/main">
+  <p:cSld>
+    <p:spTree>
+      <p:nvGrpSpPr>
+        <p:cNvPr id="1" name="">
+          <a:extLst>
+            <a:ext uri="{FF2B5EF4-FFF2-40B4-BE49-F238E27FC236}">
+              <a16:creationId xmlns:a16="http://schemas.microsoft.com/office/drawing/2014/main" id="{8BF26848-E4A3-A390-2F17-9EE534EAF6DA}"/>
+            </a:ext>
+          </a:extLst>
+        </p:cNvPr>
+        <p:cNvGrpSpPr/>
+        <p:nvPr/>
+      </p:nvGrpSpPr>
+      <p:grpSpPr>
+        <a:xfrm>
+          <a:off x="0" y="0"/>
+          <a:ext cx="0" cy="0"/>
+          <a:chOff x="0" y="0"/>
+          <a:chExt cx="0" cy="0"/>
+        </a:xfrm>
+      </p:grpSpPr>
+      <p:sp>
+        <p:nvSpPr>
+          <p:cNvPr id="5" name="內容版面配置區 4">
+            <a:extLst>
+              <a:ext uri="{FF2B5EF4-FFF2-40B4-BE49-F238E27FC236}">
+                <a16:creationId xmlns:a16="http://schemas.microsoft.com/office/drawing/2014/main" id="{D8F03194-1342-0762-FC3A-DCCFACF5D657}"/>
+              </a:ext>
+            </a:extLst>
+          </p:cNvPr>
+          <p:cNvSpPr>
+            <a:spLocks noGrp="1"/>
+          </p:cNvSpPr>
+          <p:nvPr>
+            <p:ph idx="1"/>
+          </p:nvPr>
+        </p:nvSpPr>
+        <p:spPr>
+          <a:xfrm>
+            <a:off x="0" y="2084851"/>
+            <a:ext cx="12192000" cy="2404863"/>
+          </a:xfrm>
+        </p:spPr>
+        <p:txBody>
+          <a:bodyPr anchor="ctr">
+            <a:normAutofit/>
+          </a:bodyPr>
+          <a:lstStyle/>
+          <a:p>
+            <a:pPr algn="ctr">
+              <a:buNone/>
+            </a:pPr>
+            <a:r>
+              <a:rPr lang="zh-TW" altLang="en-US" sz="6400" b="1" dirty="0">
+                <a:solidFill>
+                  <a:srgbClr val="000066"/>
+                </a:solidFill>
+                <a:latin typeface="微軟正黑體" pitchFamily="34" charset="-120"/>
+                <a:ea typeface="微軟正黑體" pitchFamily="34" charset="-120"/>
+              </a:rPr>
+              <a:t>當身處孤單傷痛  來擁我入懷</a:t>
+            </a:r>
+            <a:endParaRPr lang="en-US" altLang="zh-TW" sz="6400" b="1" dirty="0">
+              <a:solidFill>
+                <a:srgbClr val="000066"/>
+              </a:solidFill>
               <a:latin typeface="微軟正黑體" pitchFamily="34" charset="-120"/>
               <a:ea typeface="微軟正黑體" pitchFamily="34" charset="-120"/>
             </a:endParaRPr>
           </a:p>
-        </p:txBody>
-      </p:sp>
-      <p:sp>
-        <p:nvSpPr>
-          <p:cNvPr id="5" name="Content Placeholder 4"/>
-          <p:cNvSpPr>
-            <a:spLocks noGrp="1"/>
-          </p:cNvSpPr>
-          <p:nvPr>
-            <p:ph idx="1"/>
-          </p:nvPr>
+          <a:p>
+            <a:pPr algn="ctr">
+              <a:buNone/>
+            </a:pPr>
+            <a:r>
+              <a:rPr lang="zh-TW" altLang="en-US" sz="6400" b="1" dirty="0">
+                <a:solidFill>
+                  <a:srgbClr val="000066"/>
+                </a:solidFill>
+                <a:latin typeface="微軟正黑體" pitchFamily="34" charset="-120"/>
+                <a:ea typeface="微軟正黑體" pitchFamily="34" charset="-120"/>
+              </a:rPr>
+              <a:t>祢是我神  是我奇妙救恩</a:t>
+            </a:r>
+          </a:p>
+        </p:txBody>
+      </p:sp>
+      <p:sp>
+        <p:nvSpPr>
+          <p:cNvPr id="3" name="TextBox 2">
+            <a:extLst>
+              <a:ext uri="{FF2B5EF4-FFF2-40B4-BE49-F238E27FC236}">
+                <a16:creationId xmlns:a16="http://schemas.microsoft.com/office/drawing/2014/main" id="{0B47977F-766E-1ECA-4F8B-CB3C5590EF21}"/>
+              </a:ext>
+            </a:extLst>
+          </p:cNvPr>
+          <p:cNvSpPr txBox="1"/>
+          <p:nvPr/>
         </p:nvSpPr>
         <p:spPr>
           <a:xfrm>
-            <a:off x="152400" y="1600200"/>
-            <a:ext cx="8839200" cy="5029200"/>
+            <a:off x="0" y="5157193"/>
+            <a:ext cx="12192000" cy="584775"/>
+          </a:xfrm>
+          <a:prstGeom prst="rect">
+            <a:avLst/>
+          </a:prstGeom>
+          <a:noFill/>
+        </p:spPr>
+        <p:txBody>
+          <a:bodyPr wrap="square" rtlCol="0">
+            <a:spAutoFit/>
+          </a:bodyPr>
+          <a:lstStyle/>
+          <a:p>
+            <a:pPr algn="ctr"/>
+            <a:r>
+              <a:rPr lang="en-US" sz="3200" b="1" dirty="0">
+                <a:solidFill>
+                  <a:srgbClr val="000066"/>
+                </a:solidFill>
+                <a:latin typeface="Microsoft JhengHei" panose="020B0604030504040204" pitchFamily="34" charset="-120"/>
+                <a:ea typeface="Microsoft JhengHei" panose="020B0604030504040204" pitchFamily="34" charset="-120"/>
+              </a:rPr>
+              <a:t>( </a:t>
+            </a:r>
+            <a:r>
+              <a:rPr lang="zh-CN" altLang="en-US" sz="3200" b="1" dirty="0">
+                <a:solidFill>
+                  <a:srgbClr val="000066"/>
+                </a:solidFill>
+                <a:latin typeface="Microsoft JhengHei" panose="020B0604030504040204" pitchFamily="34" charset="-120"/>
+                <a:ea typeface="Microsoft JhengHei" panose="020B0604030504040204" pitchFamily="34" charset="-120"/>
+              </a:rPr>
+              <a:t>正歌</a:t>
+            </a:r>
+            <a:r>
+              <a:rPr lang="en-US" sz="3200" b="1" dirty="0">
+                <a:solidFill>
+                  <a:srgbClr val="000066"/>
+                </a:solidFill>
+                <a:latin typeface="Microsoft JhengHei" panose="020B0604030504040204" pitchFamily="34" charset="-120"/>
+                <a:ea typeface="Microsoft JhengHei" panose="020B0604030504040204" pitchFamily="34" charset="-120"/>
+              </a:rPr>
+              <a:t> )</a:t>
+            </a:r>
+            <a:endParaRPr lang="vi-VN" sz="3200" b="1" dirty="0">
+              <a:solidFill>
+                <a:srgbClr val="000066"/>
+              </a:solidFill>
+              <a:ea typeface="Microsoft JhengHei" panose="020B0604030504040204" pitchFamily="34" charset="-120"/>
+            </a:endParaRPr>
+          </a:p>
+        </p:txBody>
+      </p:sp>
+    </p:spTree>
+    <p:extLst>
+      <p:ext uri="{BB962C8B-B14F-4D97-AF65-F5344CB8AC3E}">
+        <p14:creationId xmlns:p14="http://schemas.microsoft.com/office/powerpoint/2010/main" val="523734906"/>
+      </p:ext>
+    </p:extLst>
+  </p:cSld>
+  <p:clrMapOvr>
+    <a:masterClrMapping/>
+  </p:clrMapOvr>
+</p:sld>
+</file>
+
+<file path=ppt/slides/slide7.xml><?xml version="1.0" encoding="utf-8"?>
+<p:sld xmlns:a="http://schemas.openxmlformats.org/drawingml/2006/main" xmlns:r="http://schemas.openxmlformats.org/officeDocument/2006/relationships" xmlns:p="http://schemas.openxmlformats.org/presentationml/2006/main">
+  <p:cSld>
+    <p:spTree>
+      <p:nvGrpSpPr>
+        <p:cNvPr id="1" name="">
+          <a:extLst>
+            <a:ext uri="{FF2B5EF4-FFF2-40B4-BE49-F238E27FC236}">
+              <a16:creationId xmlns:a16="http://schemas.microsoft.com/office/drawing/2014/main" id="{2ED412BB-F4B5-4C38-B585-07E58659B79F}"/>
+            </a:ext>
+          </a:extLst>
+        </p:cNvPr>
+        <p:cNvGrpSpPr/>
+        <p:nvPr/>
+      </p:nvGrpSpPr>
+      <p:grpSpPr>
+        <a:xfrm>
+          <a:off x="0" y="0"/>
+          <a:ext cx="0" cy="0"/>
+          <a:chOff x="0" y="0"/>
+          <a:chExt cx="0" cy="0"/>
+        </a:xfrm>
+      </p:grpSpPr>
+      <p:sp>
+        <p:nvSpPr>
+          <p:cNvPr id="5" name="內容版面配置區 4">
+            <a:extLst>
+              <a:ext uri="{FF2B5EF4-FFF2-40B4-BE49-F238E27FC236}">
+                <a16:creationId xmlns:a16="http://schemas.microsoft.com/office/drawing/2014/main" id="{C515DC2C-59AF-7820-DFD5-AC4DE883F43B}"/>
+              </a:ext>
+            </a:extLst>
+          </p:cNvPr>
+          <p:cNvSpPr>
+            <a:spLocks noGrp="1"/>
+          </p:cNvSpPr>
+          <p:nvPr>
+            <p:ph idx="1"/>
+          </p:nvPr>
+        </p:nvSpPr>
+        <p:spPr>
+          <a:xfrm>
+            <a:off x="0" y="2084851"/>
+            <a:ext cx="12192000" cy="2404863"/>
           </a:xfrm>
         </p:spPr>
         <p:txBody>
-          <a:bodyPr>
-            <a:noAutofit/>
+          <a:bodyPr anchor="ctr">
+            <a:normAutofit/>
           </a:bodyPr>
           <a:lstStyle/>
           <a:p>
@@ -3912,34 +4476,19 @@
               <a:buNone/>
             </a:pPr>
             <a:r>
-              <a:rPr lang="zh-TW" altLang="en-US" sz="5400" b="1" dirty="0">
+              <a:rPr lang="zh-TW" altLang="en-US" sz="6400" b="1" dirty="0">
+                <a:solidFill>
+                  <a:srgbClr val="000066"/>
+                </a:solidFill>
                 <a:latin typeface="微軟正黑體" pitchFamily="34" charset="-120"/>
                 <a:ea typeface="微軟正黑體" pitchFamily="34" charset="-120"/>
               </a:rPr>
-              <a:t>全因為</a:t>
-            </a:r>
-            <a:r>
-              <a:rPr lang="zh-TW" altLang="en-US" sz="5400" b="1" dirty="0" smtClean="0">
-                <a:latin typeface="微軟正黑體" pitchFamily="34" charset="-120"/>
-                <a:ea typeface="微軟正黑體" pitchFamily="34" charset="-120"/>
-              </a:rPr>
-              <a:t>你  令</a:t>
-            </a:r>
-            <a:r>
-              <a:rPr lang="zh-TW" altLang="en-US" sz="5400" b="1" dirty="0">
-                <a:latin typeface="微軟正黑體" pitchFamily="34" charset="-120"/>
-                <a:ea typeface="微軟正黑體" pitchFamily="34" charset="-120"/>
-              </a:rPr>
-              <a:t>我一生都佳</a:t>
-            </a:r>
-            <a:r>
-              <a:rPr lang="zh-TW" altLang="en-US" sz="5400" b="1" dirty="0" smtClean="0">
-                <a:latin typeface="微軟正黑體" pitchFamily="34" charset="-120"/>
-                <a:ea typeface="微軟正黑體" pitchFamily="34" charset="-120"/>
-              </a:rPr>
-              <a:t>美</a:t>
-            </a:r>
-            <a:endParaRPr lang="en-US" altLang="zh-TW" sz="5400" b="1" dirty="0" smtClean="0">
+              <a:t>當身處孤單傷痛  來擁我入懷</a:t>
+            </a:r>
+            <a:endParaRPr lang="en-US" altLang="zh-TW" sz="6400" b="1" dirty="0">
+              <a:solidFill>
+                <a:srgbClr val="000066"/>
+              </a:solidFill>
               <a:latin typeface="微軟正黑體" pitchFamily="34" charset="-120"/>
               <a:ea typeface="微軟正黑體" pitchFamily="34" charset="-120"/>
             </a:endParaRPr>
@@ -3949,129 +4498,418 @@
               <a:buNone/>
             </a:pPr>
             <a:r>
-              <a:rPr lang="zh-TW" altLang="en-US" sz="5400" b="1" dirty="0" smtClean="0">
+              <a:rPr lang="zh-TW" altLang="en-US" sz="6400" b="1" dirty="0">
+                <a:solidFill>
+                  <a:srgbClr val="000066"/>
+                </a:solidFill>
                 <a:latin typeface="微軟正黑體" pitchFamily="34" charset="-120"/>
                 <a:ea typeface="微軟正黑體" pitchFamily="34" charset="-120"/>
               </a:rPr>
-              <a:t>你</a:t>
-            </a:r>
-            <a:r>
-              <a:rPr lang="zh-TW" altLang="en-US" sz="5400" b="1" dirty="0">
+              <a:t>祢是我神  是我奇妙救恩</a:t>
+            </a:r>
+          </a:p>
+        </p:txBody>
+      </p:sp>
+      <p:sp>
+        <p:nvSpPr>
+          <p:cNvPr id="3" name="TextBox 2">
+            <a:extLst>
+              <a:ext uri="{FF2B5EF4-FFF2-40B4-BE49-F238E27FC236}">
+                <a16:creationId xmlns:a16="http://schemas.microsoft.com/office/drawing/2014/main" id="{C55BB664-7674-419D-8631-3B6CD41B8A5E}"/>
+              </a:ext>
+            </a:extLst>
+          </p:cNvPr>
+          <p:cNvSpPr txBox="1"/>
+          <p:nvPr/>
+        </p:nvSpPr>
+        <p:spPr>
+          <a:xfrm>
+            <a:off x="0" y="5157193"/>
+            <a:ext cx="12192000" cy="584775"/>
+          </a:xfrm>
+          <a:prstGeom prst="rect">
+            <a:avLst/>
+          </a:prstGeom>
+          <a:noFill/>
+        </p:spPr>
+        <p:txBody>
+          <a:bodyPr wrap="square" rtlCol="0">
+            <a:spAutoFit/>
+          </a:bodyPr>
+          <a:lstStyle/>
+          <a:p>
+            <a:pPr algn="ctr"/>
+            <a:r>
+              <a:rPr lang="en-US" sz="3200" b="1" dirty="0">
+                <a:solidFill>
+                  <a:srgbClr val="000066"/>
+                </a:solidFill>
+                <a:latin typeface="Microsoft JhengHei" panose="020B0604030504040204" pitchFamily="34" charset="-120"/>
+                <a:ea typeface="Microsoft JhengHei" panose="020B0604030504040204" pitchFamily="34" charset="-120"/>
+              </a:rPr>
+              <a:t>( </a:t>
+            </a:r>
+            <a:r>
+              <a:rPr lang="zh-CN" altLang="en-US" sz="3200" b="1" dirty="0">
+                <a:solidFill>
+                  <a:srgbClr val="000066"/>
+                </a:solidFill>
+                <a:latin typeface="Microsoft JhengHei" panose="020B0604030504040204" pitchFamily="34" charset="-120"/>
+                <a:ea typeface="Microsoft JhengHei" panose="020B0604030504040204" pitchFamily="34" charset="-120"/>
+              </a:rPr>
+              <a:t>正歌</a:t>
+            </a:r>
+            <a:r>
+              <a:rPr lang="en-US" sz="3200" b="1" dirty="0">
+                <a:solidFill>
+                  <a:srgbClr val="000066"/>
+                </a:solidFill>
+                <a:latin typeface="Microsoft JhengHei" panose="020B0604030504040204" pitchFamily="34" charset="-120"/>
+                <a:ea typeface="Microsoft JhengHei" panose="020B0604030504040204" pitchFamily="34" charset="-120"/>
+              </a:rPr>
+              <a:t> )</a:t>
+            </a:r>
+            <a:endParaRPr lang="vi-VN" sz="3200" b="1" dirty="0">
+              <a:solidFill>
+                <a:srgbClr val="000066"/>
+              </a:solidFill>
+              <a:ea typeface="Microsoft JhengHei" panose="020B0604030504040204" pitchFamily="34" charset="-120"/>
+            </a:endParaRPr>
+          </a:p>
+        </p:txBody>
+      </p:sp>
+    </p:spTree>
+    <p:extLst>
+      <p:ext uri="{BB962C8B-B14F-4D97-AF65-F5344CB8AC3E}">
+        <p14:creationId xmlns:p14="http://schemas.microsoft.com/office/powerpoint/2010/main" val="2151945588"/>
+      </p:ext>
+    </p:extLst>
+  </p:cSld>
+  <p:clrMapOvr>
+    <a:masterClrMapping/>
+  </p:clrMapOvr>
+</p:sld>
+</file>
+
+<file path=ppt/slides/slide8.xml><?xml version="1.0" encoding="utf-8"?>
+<p:sld xmlns:a="http://schemas.openxmlformats.org/drawingml/2006/main" xmlns:r="http://schemas.openxmlformats.org/officeDocument/2006/relationships" xmlns:p="http://schemas.openxmlformats.org/presentationml/2006/main">
+  <p:cSld>
+    <p:spTree>
+      <p:nvGrpSpPr>
+        <p:cNvPr id="1" name="">
+          <a:extLst>
+            <a:ext uri="{FF2B5EF4-FFF2-40B4-BE49-F238E27FC236}">
+              <a16:creationId xmlns:a16="http://schemas.microsoft.com/office/drawing/2014/main" id="{1655163D-E026-FE8C-0301-2979AC29DBC7}"/>
+            </a:ext>
+          </a:extLst>
+        </p:cNvPr>
+        <p:cNvGrpSpPr/>
+        <p:nvPr/>
+      </p:nvGrpSpPr>
+      <p:grpSpPr>
+        <a:xfrm>
+          <a:off x="0" y="0"/>
+          <a:ext cx="0" cy="0"/>
+          <a:chOff x="0" y="0"/>
+          <a:chExt cx="0" cy="0"/>
+        </a:xfrm>
+      </p:grpSpPr>
+      <p:sp>
+        <p:nvSpPr>
+          <p:cNvPr id="5" name="內容版面配置區 4">
+            <a:extLst>
+              <a:ext uri="{FF2B5EF4-FFF2-40B4-BE49-F238E27FC236}">
+                <a16:creationId xmlns:a16="http://schemas.microsoft.com/office/drawing/2014/main" id="{B0AEE938-6EEE-32B5-F4F1-E2398496228F}"/>
+              </a:ext>
+            </a:extLst>
+          </p:cNvPr>
+          <p:cNvSpPr>
+            <a:spLocks noGrp="1"/>
+          </p:cNvSpPr>
+          <p:nvPr>
+            <p:ph idx="1"/>
+          </p:nvPr>
+        </p:nvSpPr>
+        <p:spPr>
+          <a:xfrm>
+            <a:off x="0" y="2084851"/>
+            <a:ext cx="12192000" cy="2404863"/>
+          </a:xfrm>
+        </p:spPr>
+        <p:txBody>
+          <a:bodyPr anchor="ctr">
+            <a:normAutofit/>
+          </a:bodyPr>
+          <a:lstStyle/>
+          <a:p>
+            <a:pPr algn="ctr">
+              <a:buNone/>
+            </a:pPr>
+            <a:r>
+              <a:rPr lang="zh-TW" altLang="en-US" sz="6400" b="1" dirty="0">
+                <a:solidFill>
+                  <a:srgbClr val="000066"/>
+                </a:solidFill>
                 <a:latin typeface="微軟正黑體" pitchFamily="34" charset="-120"/>
                 <a:ea typeface="微軟正黑體" pitchFamily="34" charset="-120"/>
               </a:rPr>
-              <a:t>令我生命從空</a:t>
-            </a:r>
-            <a:r>
-              <a:rPr lang="zh-TW" altLang="en-US" sz="5400" b="1" dirty="0" smtClean="0">
+              <a:t>全因為祢  令我一生都佳美</a:t>
+            </a:r>
+          </a:p>
+          <a:p>
+            <a:pPr algn="ctr">
+              <a:buNone/>
+            </a:pPr>
+            <a:r>
+              <a:rPr lang="zh-TW" altLang="en-US" sz="6400" b="1" dirty="0">
+                <a:solidFill>
+                  <a:srgbClr val="000066"/>
+                </a:solidFill>
                 <a:latin typeface="微軟正黑體" pitchFamily="34" charset="-120"/>
                 <a:ea typeface="微軟正黑體" pitchFamily="34" charset="-120"/>
               </a:rPr>
-              <a:t>虛  化</a:t>
-            </a:r>
-            <a:r>
-              <a:rPr lang="zh-TW" altLang="en-US" sz="5400" b="1" dirty="0">
+              <a:t>祢令我生命從空虛  化做傳奇</a:t>
+            </a:r>
+          </a:p>
+        </p:txBody>
+      </p:sp>
+      <p:sp>
+        <p:nvSpPr>
+          <p:cNvPr id="3" name="TextBox 2">
+            <a:extLst>
+              <a:ext uri="{FF2B5EF4-FFF2-40B4-BE49-F238E27FC236}">
+                <a16:creationId xmlns:a16="http://schemas.microsoft.com/office/drawing/2014/main" id="{99C6CADD-C4A5-0CBB-D2C7-C37343012F63}"/>
+              </a:ext>
+            </a:extLst>
+          </p:cNvPr>
+          <p:cNvSpPr txBox="1"/>
+          <p:nvPr/>
+        </p:nvSpPr>
+        <p:spPr>
+          <a:xfrm>
+            <a:off x="0" y="5157193"/>
+            <a:ext cx="12192000" cy="584775"/>
+          </a:xfrm>
+          <a:prstGeom prst="rect">
+            <a:avLst/>
+          </a:prstGeom>
+          <a:noFill/>
+        </p:spPr>
+        <p:txBody>
+          <a:bodyPr wrap="square" rtlCol="0">
+            <a:spAutoFit/>
+          </a:bodyPr>
+          <a:lstStyle/>
+          <a:p>
+            <a:pPr algn="ctr"/>
+            <a:r>
+              <a:rPr lang="en-US" sz="3200" b="1" dirty="0">
+                <a:solidFill>
+                  <a:srgbClr val="000066"/>
+                </a:solidFill>
+                <a:latin typeface="Microsoft JhengHei" panose="020B0604030504040204" pitchFamily="34" charset="-120"/>
+                <a:ea typeface="Microsoft JhengHei" panose="020B0604030504040204" pitchFamily="34" charset="-120"/>
+              </a:rPr>
+              <a:t>( </a:t>
+            </a:r>
+            <a:r>
+              <a:rPr lang="zh-CN" altLang="en-US" sz="3200" b="1" dirty="0">
+                <a:solidFill>
+                  <a:srgbClr val="000066"/>
+                </a:solidFill>
+                <a:latin typeface="Microsoft JhengHei" panose="020B0604030504040204" pitchFamily="34" charset="-120"/>
+                <a:ea typeface="Microsoft JhengHei" panose="020B0604030504040204" pitchFamily="34" charset="-120"/>
+              </a:rPr>
+              <a:t>副歌</a:t>
+            </a:r>
+            <a:r>
+              <a:rPr lang="en-US" sz="3200" b="1" dirty="0">
+                <a:solidFill>
+                  <a:srgbClr val="000066"/>
+                </a:solidFill>
+                <a:latin typeface="Microsoft JhengHei" panose="020B0604030504040204" pitchFamily="34" charset="-120"/>
+                <a:ea typeface="Microsoft JhengHei" panose="020B0604030504040204" pitchFamily="34" charset="-120"/>
+              </a:rPr>
+              <a:t> )</a:t>
+            </a:r>
+            <a:endParaRPr lang="vi-VN" sz="3200" b="1" dirty="0">
+              <a:solidFill>
+                <a:srgbClr val="000066"/>
+              </a:solidFill>
+              <a:ea typeface="Microsoft JhengHei" panose="020B0604030504040204" pitchFamily="34" charset="-120"/>
+            </a:endParaRPr>
+          </a:p>
+        </p:txBody>
+      </p:sp>
+    </p:spTree>
+    <p:extLst>
+      <p:ext uri="{BB962C8B-B14F-4D97-AF65-F5344CB8AC3E}">
+        <p14:creationId xmlns:p14="http://schemas.microsoft.com/office/powerpoint/2010/main" val="2485820693"/>
+      </p:ext>
+    </p:extLst>
+  </p:cSld>
+  <p:clrMapOvr>
+    <a:masterClrMapping/>
+  </p:clrMapOvr>
+</p:sld>
+</file>
+
+<file path=ppt/slides/slide9.xml><?xml version="1.0" encoding="utf-8"?>
+<p:sld xmlns:a="http://schemas.openxmlformats.org/drawingml/2006/main" xmlns:r="http://schemas.openxmlformats.org/officeDocument/2006/relationships" xmlns:p="http://schemas.openxmlformats.org/presentationml/2006/main">
+  <p:cSld>
+    <p:spTree>
+      <p:nvGrpSpPr>
+        <p:cNvPr id="1" name="">
+          <a:extLst>
+            <a:ext uri="{FF2B5EF4-FFF2-40B4-BE49-F238E27FC236}">
+              <a16:creationId xmlns:a16="http://schemas.microsoft.com/office/drawing/2014/main" id="{B41EA6A9-A4F8-43C1-64DF-0DD70480AA42}"/>
+            </a:ext>
+          </a:extLst>
+        </p:cNvPr>
+        <p:cNvGrpSpPr/>
+        <p:nvPr/>
+      </p:nvGrpSpPr>
+      <p:grpSpPr>
+        <a:xfrm>
+          <a:off x="0" y="0"/>
+          <a:ext cx="0" cy="0"/>
+          <a:chOff x="0" y="0"/>
+          <a:chExt cx="0" cy="0"/>
+        </a:xfrm>
+      </p:grpSpPr>
+      <p:sp>
+        <p:nvSpPr>
+          <p:cNvPr id="5" name="內容版面配置區 4">
+            <a:extLst>
+              <a:ext uri="{FF2B5EF4-FFF2-40B4-BE49-F238E27FC236}">
+                <a16:creationId xmlns:a16="http://schemas.microsoft.com/office/drawing/2014/main" id="{095678C3-DCA3-2126-9078-CE195834379D}"/>
+              </a:ext>
+            </a:extLst>
+          </p:cNvPr>
+          <p:cNvSpPr>
+            <a:spLocks noGrp="1"/>
+          </p:cNvSpPr>
+          <p:nvPr>
+            <p:ph idx="1"/>
+          </p:nvPr>
+        </p:nvSpPr>
+        <p:spPr>
+          <a:xfrm>
+            <a:off x="0" y="2084851"/>
+            <a:ext cx="12192000" cy="2404863"/>
+          </a:xfrm>
+        </p:spPr>
+        <p:txBody>
+          <a:bodyPr anchor="ctr">
+            <a:normAutofit/>
+          </a:bodyPr>
+          <a:lstStyle/>
+          <a:p>
+            <a:pPr algn="ctr">
+              <a:buNone/>
+            </a:pPr>
+            <a:r>
+              <a:rPr lang="zh-TW" altLang="en-US" sz="6400" b="1" dirty="0">
+                <a:solidFill>
+                  <a:srgbClr val="000066"/>
+                </a:solidFill>
                 <a:latin typeface="微軟正黑體" pitchFamily="34" charset="-120"/>
                 <a:ea typeface="微軟正黑體" pitchFamily="34" charset="-120"/>
               </a:rPr>
-              <a:t>做</a:t>
-            </a:r>
-            <a:r>
-              <a:rPr lang="zh-TW" altLang="en-US" sz="5400" b="1" dirty="0" smtClean="0">
+              <a:t>無論我壯如紅日</a:t>
+            </a:r>
+          </a:p>
+          <a:p>
+            <a:pPr algn="ctr">
+              <a:buNone/>
+            </a:pPr>
+            <a:r>
+              <a:rPr lang="zh-TW" altLang="en-US" sz="6400" b="1" dirty="0">
+                <a:solidFill>
+                  <a:srgbClr val="000066"/>
+                </a:solidFill>
                 <a:latin typeface="微軟正黑體" pitchFamily="34" charset="-120"/>
                 <a:ea typeface="微軟正黑體" pitchFamily="34" charset="-120"/>
               </a:rPr>
-              <a:t>傳奇</a:t>
-            </a:r>
-            <a:endParaRPr lang="en-US" altLang="zh-TW" sz="5400" b="1" dirty="0" smtClean="0">
-              <a:latin typeface="微軟正黑體" pitchFamily="34" charset="-120"/>
-              <a:ea typeface="微軟正黑體" pitchFamily="34" charset="-120"/>
+              <a:t>或如黃昏般漸漸老</a:t>
+            </a:r>
+          </a:p>
+        </p:txBody>
+      </p:sp>
+      <p:sp>
+        <p:nvSpPr>
+          <p:cNvPr id="3" name="TextBox 2">
+            <a:extLst>
+              <a:ext uri="{FF2B5EF4-FFF2-40B4-BE49-F238E27FC236}">
+                <a16:creationId xmlns:a16="http://schemas.microsoft.com/office/drawing/2014/main" id="{79C57140-2D02-ACCD-7491-36BD34DB759C}"/>
+              </a:ext>
+            </a:extLst>
+          </p:cNvPr>
+          <p:cNvSpPr txBox="1"/>
+          <p:nvPr/>
+        </p:nvSpPr>
+        <p:spPr>
+          <a:xfrm>
+            <a:off x="0" y="5157193"/>
+            <a:ext cx="12192000" cy="584775"/>
+          </a:xfrm>
+          <a:prstGeom prst="rect">
+            <a:avLst/>
+          </a:prstGeom>
+          <a:noFill/>
+        </p:spPr>
+        <p:txBody>
+          <a:bodyPr wrap="square" rtlCol="0">
+            <a:spAutoFit/>
+          </a:bodyPr>
+          <a:lstStyle/>
+          <a:p>
+            <a:pPr algn="ctr"/>
+            <a:r>
+              <a:rPr lang="en-US" sz="3200" b="1" dirty="0">
+                <a:solidFill>
+                  <a:srgbClr val="000066"/>
+                </a:solidFill>
+                <a:latin typeface="Microsoft JhengHei" panose="020B0604030504040204" pitchFamily="34" charset="-120"/>
+                <a:ea typeface="Microsoft JhengHei" panose="020B0604030504040204" pitchFamily="34" charset="-120"/>
+              </a:rPr>
+              <a:t>( </a:t>
+            </a:r>
+            <a:r>
+              <a:rPr lang="zh-CN" altLang="en-US" sz="3200" b="1" dirty="0">
+                <a:solidFill>
+                  <a:srgbClr val="000066"/>
+                </a:solidFill>
+                <a:latin typeface="Microsoft JhengHei" panose="020B0604030504040204" pitchFamily="34" charset="-120"/>
+                <a:ea typeface="Microsoft JhengHei" panose="020B0604030504040204" pitchFamily="34" charset="-120"/>
+              </a:rPr>
+              <a:t>副歌</a:t>
+            </a:r>
+            <a:r>
+              <a:rPr lang="en-US" sz="3200" b="1" dirty="0">
+                <a:solidFill>
+                  <a:srgbClr val="000066"/>
+                </a:solidFill>
+                <a:latin typeface="Microsoft JhengHei" panose="020B0604030504040204" pitchFamily="34" charset="-120"/>
+                <a:ea typeface="Microsoft JhengHei" panose="020B0604030504040204" pitchFamily="34" charset="-120"/>
+              </a:rPr>
+              <a:t> )</a:t>
+            </a:r>
+            <a:endParaRPr lang="vi-VN" sz="3200" b="1" dirty="0">
+              <a:solidFill>
+                <a:srgbClr val="000066"/>
+              </a:solidFill>
+              <a:ea typeface="Microsoft JhengHei" panose="020B0604030504040204" pitchFamily="34" charset="-120"/>
             </a:endParaRPr>
           </a:p>
-          <a:p>
-            <a:pPr algn="ctr">
-              <a:buNone/>
-            </a:pPr>
-            <a:r>
-              <a:rPr lang="zh-TW" altLang="en-US" sz="5400" b="1" dirty="0" smtClean="0">
-                <a:latin typeface="微軟正黑體" pitchFamily="34" charset="-120"/>
-                <a:ea typeface="微軟正黑體" pitchFamily="34" charset="-120"/>
-              </a:rPr>
-              <a:t>唯</a:t>
-            </a:r>
-            <a:r>
-              <a:rPr lang="zh-TW" altLang="en-US" sz="5400" b="1" dirty="0">
-                <a:latin typeface="微軟正黑體" pitchFamily="34" charset="-120"/>
-                <a:ea typeface="微軟正黑體" pitchFamily="34" charset="-120"/>
-              </a:rPr>
-              <a:t>獨你是我拯</a:t>
-            </a:r>
-            <a:r>
-              <a:rPr lang="zh-TW" altLang="en-US" sz="5400" b="1" dirty="0" smtClean="0">
-                <a:latin typeface="微軟正黑體" pitchFamily="34" charset="-120"/>
-                <a:ea typeface="微軟正黑體" pitchFamily="34" charset="-120"/>
-              </a:rPr>
-              <a:t>救  我</a:t>
-            </a:r>
-            <a:r>
-              <a:rPr lang="zh-TW" altLang="en-US" sz="5400" b="1" dirty="0">
-                <a:latin typeface="微軟正黑體" pitchFamily="34" charset="-120"/>
-                <a:ea typeface="微軟正黑體" pitchFamily="34" charset="-120"/>
-              </a:rPr>
-              <a:t>總不至</a:t>
-            </a:r>
-            <a:r>
-              <a:rPr lang="zh-TW" altLang="en-US" sz="5400" b="1" dirty="0" smtClean="0">
-                <a:latin typeface="微軟正黑體" pitchFamily="34" charset="-120"/>
-                <a:ea typeface="微軟正黑體" pitchFamily="34" charset="-120"/>
-              </a:rPr>
-              <a:t>死</a:t>
-            </a:r>
-            <a:endParaRPr lang="en-US" altLang="zh-TW" sz="5400" b="1" dirty="0" smtClean="0">
-              <a:latin typeface="微軟正黑體" pitchFamily="34" charset="-120"/>
-              <a:ea typeface="微軟正黑體" pitchFamily="34" charset="-120"/>
-            </a:endParaRPr>
-          </a:p>
-          <a:p>
-            <a:pPr algn="ctr">
-              <a:buNone/>
-            </a:pPr>
-            <a:r>
-              <a:rPr lang="zh-TW" altLang="en-US" sz="5400" b="1" dirty="0" smtClean="0">
-                <a:latin typeface="微軟正黑體" pitchFamily="34" charset="-120"/>
-                <a:ea typeface="微軟正黑體" pitchFamily="34" charset="-120"/>
-              </a:rPr>
-              <a:t>直</a:t>
-            </a:r>
-            <a:r>
-              <a:rPr lang="zh-TW" altLang="en-US" sz="5400" b="1" dirty="0">
-                <a:latin typeface="微軟正黑體" pitchFamily="34" charset="-120"/>
-                <a:ea typeface="微軟正黑體" pitchFamily="34" charset="-120"/>
-              </a:rPr>
-              <a:t>到永</a:t>
-            </a:r>
-            <a:r>
-              <a:rPr lang="zh-TW" altLang="en-US" sz="5400" b="1" dirty="0" smtClean="0">
-                <a:latin typeface="微軟正黑體" pitchFamily="34" charset="-120"/>
-                <a:ea typeface="微軟正黑體" pitchFamily="34" charset="-120"/>
-              </a:rPr>
-              <a:t>遠  從</a:t>
-            </a:r>
-            <a:r>
-              <a:rPr lang="zh-TW" altLang="en-US" sz="5400" b="1" dirty="0">
-                <a:latin typeface="微軟正黑體" pitchFamily="34" charset="-120"/>
-                <a:ea typeface="微軟正黑體" pitchFamily="34" charset="-120"/>
-              </a:rPr>
-              <a:t>心底讚美</a:t>
-            </a:r>
-            <a:endParaRPr lang="en-US" sz="5400" b="1" dirty="0">
-              <a:latin typeface="微軟正黑體" pitchFamily="34" charset="-120"/>
-              <a:ea typeface="微軟正黑體" pitchFamily="34" charset="-120"/>
-            </a:endParaRPr>
-          </a:p>
         </p:txBody>
       </p:sp>
     </p:spTree>
+    <p:extLst>
+      <p:ext uri="{BB962C8B-B14F-4D97-AF65-F5344CB8AC3E}">
+        <p14:creationId xmlns:p14="http://schemas.microsoft.com/office/powerpoint/2010/main" val="2347725287"/>
+      </p:ext>
+    </p:extLst>
   </p:cSld>
   <p:clrMapOvr>
     <a:masterClrMapping/>
